--- a/thesis/Thesis_Figures_Editable.pptx
+++ b/thesis/Thesis_Figures_Editable.pptx
@@ -112,6 +112,1411 @@
     </a:lvl9pPr>
   </p:defaultTextStyle>
 </p:presentation>
+</file>
+
+<file path=ppt/charts/chart1.xml><?xml version="1.0" encoding="utf-8"?>
+<c:chartSpace xmlns:c="http://schemas.openxmlformats.org/drawingml/2006/chart" xmlns:a="http://schemas.openxmlformats.org/drawingml/2006/main" xmlns:r="http://schemas.openxmlformats.org/officeDocument/2006/relationships">
+  <c:date1904 val="0"/>
+  <c:chart>
+    <c:autoTitleDeleted val="0"/>
+    <c:plotArea>
+      <c:barChart>
+        <c:barDir val="col"/>
+        <c:grouping val="clustered"/>
+        <c:ser>
+          <c:idx val="0"/>
+          <c:order val="0"/>
+          <c:tx>
+            <c:strRef>
+              <c:f>Sheet1!$B$1</c:f>
+              <c:strCache>
+                <c:ptCount val="1"/>
+                <c:pt idx="0">
+                  <c:v>macro F1</c:v>
+                </c:pt>
+              </c:strCache>
+            </c:strRef>
+          </c:tx>
+          <c:spPr>
+            <a:solidFill>
+              <a:srgbClr val="2E5E8C"/>
+            </a:solidFill>
+          </c:spPr>
+          <c:cat>
+            <c:strRef>
+              <c:f>Sheet1!$A$2:$A$6</c:f>
+              <c:strCache>
+                <c:ptCount val="5"/>
+                <c:pt idx="0">
+                  <c:v>MLP head, ViT-B</c:v>
+                </c:pt>
+                <c:pt idx="1">
+                  <c:v>temporal head, ViT-B</c:v>
+                </c:pt>
+                <c:pt idx="2">
+                  <c:v>+ lr 3e-4</c:v>
+                </c:pt>
+                <c:pt idx="3">
+                  <c:v>+ ViT-L features</c:v>
+                </c:pt>
+                <c:pt idx="4">
+                  <c:v>+ mixup 0.2 + logit adjust</c:v>
+                </c:pt>
+              </c:strCache>
+            </c:strRef>
+          </c:cat>
+          <c:val>
+            <c:numRef>
+              <c:f>Sheet1!$B$2:$B$6</c:f>
+              <c:numCache>
+                <c:formatCode>0.0000</c:formatCode>
+                <c:ptCount val="5"/>
+                <c:pt idx="0">
+                  <c:v>0.2975</c:v>
+                </c:pt>
+                <c:pt idx="1">
+                  <c:v>0.3444</c:v>
+                </c:pt>
+                <c:pt idx="2">
+                  <c:v>0.3645</c:v>
+                </c:pt>
+                <c:pt idx="3">
+                  <c:v>0.4122</c:v>
+                </c:pt>
+                <c:pt idx="4">
+                  <c:v>0.4298</c:v>
+                </c:pt>
+              </c:numCache>
+            </c:numRef>
+          </c:val>
+        </c:ser>
+        <c:dLbls>
+          <c:numFmt formatCode="0.0000" sourceLinked="0"/>
+          <c:txPr>
+            <a:bodyPr/>
+            <a:lstStyle/>
+            <a:p>
+              <a:pPr>
+                <a:defRPr sz="800">
+                  <a:solidFill>
+                    <a:srgbClr val="1B2236"/>
+                  </a:solidFill>
+                </a:defRPr>
+              </a:pPr>
+            </a:p>
+          </c:txPr>
+          <c:showLegendKey val="0"/>
+          <c:showVal val="1"/>
+          <c:showCatName val="0"/>
+          <c:showSerName val="0"/>
+          <c:showPercent val="0"/>
+          <c:showBubbleSize val="0"/>
+          <c:showLeaderLines val="1"/>
+        </c:dLbls>
+        <c:gapWidth val="60"/>
+        <c:axId val="-2068027336"/>
+        <c:axId val="-2113994440"/>
+      </c:barChart>
+      <c:catAx>
+        <c:axId val="-2068027336"/>
+        <c:scaling>
+          <c:orientation val="minMax"/>
+        </c:scaling>
+        <c:delete val="0"/>
+        <c:axPos val="b"/>
+        <c:majorTickMark val="out"/>
+        <c:minorTickMark val="none"/>
+        <c:tickLblPos val="nextTo"/>
+        <c:txPr>
+          <a:bodyPr/>
+          <a:lstStyle/>
+          <a:p>
+            <a:pPr>
+              <a:defRPr sz="900">
+                <a:solidFill>
+                  <a:srgbClr val="1B2236"/>
+                </a:solidFill>
+              </a:defRPr>
+            </a:pPr>
+          </a:p>
+        </c:txPr>
+        <c:crossAx val="-2113994440"/>
+        <c:crosses val="autoZero"/>
+        <c:auto val="1"/>
+        <c:lblAlgn val="ctr"/>
+        <c:lblOffset val="100"/>
+        <c:noMultiLvlLbl val="0"/>
+      </c:catAx>
+      <c:valAx>
+        <c:axId val="-2113994440"/>
+        <c:scaling/>
+        <c:delete val="0"/>
+        <c:axPos val="l"/>
+        <c:majorGridlines/>
+        <c:majorTickMark val="out"/>
+        <c:minorTickMark val="none"/>
+        <c:tickLblPos val="nextTo"/>
+        <c:txPr>
+          <a:bodyPr/>
+          <a:lstStyle/>
+          <a:p>
+            <a:pPr>
+              <a:defRPr sz="900">
+                <a:solidFill>
+                  <a:srgbClr val="1B2236"/>
+                </a:solidFill>
+              </a:defRPr>
+            </a:pPr>
+          </a:p>
+        </c:txPr>
+        <c:crossAx val="-2068027336"/>
+        <c:crosses val="autoZero"/>
+      </c:valAx>
+    </c:plotArea>
+    <c:dispBlanksAs val="gap"/>
+  </c:chart>
+  <c:txPr>
+    <a:bodyPr/>
+    <a:lstStyle/>
+    <a:p>
+      <a:pPr>
+        <a:defRPr sz="1800"/>
+      </a:pPr>
+      <a:endParaRPr lang="en-US"/>
+    </a:p>
+  </c:txPr>
+  <c:externalData r:id="rId1">
+    <c:autoUpdate val="0"/>
+  </c:externalData>
+</c:chartSpace>
+</file>
+
+<file path=ppt/charts/chart2.xml><?xml version="1.0" encoding="utf-8"?>
+<c:chartSpace xmlns:c="http://schemas.openxmlformats.org/drawingml/2006/chart" xmlns:a="http://schemas.openxmlformats.org/drawingml/2006/main" xmlns:r="http://schemas.openxmlformats.org/officeDocument/2006/relationships">
+  <c:date1904 val="0"/>
+  <c:chart>
+    <c:autoTitleDeleted val="0"/>
+    <c:plotArea>
+      <c:barChart>
+        <c:barDir val="col"/>
+        <c:grouping val="clustered"/>
+        <c:ser>
+          <c:idx val="0"/>
+          <c:order val="0"/>
+          <c:tx>
+            <c:strRef>
+              <c:f>Sheet1!$B$1</c:f>
+              <c:strCache>
+                <c:ptCount val="1"/>
+                <c:pt idx="0">
+                  <c:v>X-CLIP fine-tuned</c:v>
+                </c:pt>
+              </c:strCache>
+            </c:strRef>
+          </c:tx>
+          <c:spPr>
+            <a:solidFill>
+              <a:srgbClr val="6A748C"/>
+            </a:solidFill>
+          </c:spPr>
+          <c:cat>
+            <c:strRef>
+              <c:f>Sheet1!$A$2:$A$5</c:f>
+              <c:strCache>
+                <c:ptCount val="4"/>
+                <c:pt idx="0">
+                  <c:v>binary AUC</c:v>
+                </c:pt>
+                <c:pt idx="1">
+                  <c:v>accuracy</c:v>
+                </c:pt>
+                <c:pt idx="2">
+                  <c:v>type accuracy</c:v>
+                </c:pt>
+                <c:pt idx="3">
+                  <c:v>macro F1</c:v>
+                </c:pt>
+              </c:strCache>
+            </c:strRef>
+          </c:cat>
+          <c:val>
+            <c:numRef>
+              <c:f>Sheet1!$B$2:$B$5</c:f>
+              <c:numCache>
+                <c:formatCode>0.000</c:formatCode>
+                <c:ptCount val="4"/>
+                <c:pt idx="0">
+                  <c:v>0.9629</c:v>
+                </c:pt>
+                <c:pt idx="1">
+                  <c:v>0.6419</c:v>
+                </c:pt>
+                <c:pt idx="2">
+                  <c:v>0.4257</c:v>
+                </c:pt>
+                <c:pt idx="3">
+                  <c:v>0.3881</c:v>
+                </c:pt>
+              </c:numCache>
+            </c:numRef>
+          </c:val>
+        </c:ser>
+        <c:ser>
+          <c:idx val="1"/>
+          <c:order val="1"/>
+          <c:tx>
+            <c:strRef>
+              <c:f>Sheet1!$C$1</c:f>
+              <c:strCache>
+                <c:ptCount val="1"/>
+                <c:pt idx="0">
+                  <c:v>VideoMAE ViT-B (frozen)</c:v>
+                </c:pt>
+              </c:strCache>
+            </c:strRef>
+          </c:tx>
+          <c:spPr>
+            <a:solidFill>
+              <a:srgbClr val="2E5E8C"/>
+            </a:solidFill>
+          </c:spPr>
+          <c:cat>
+            <c:strRef>
+              <c:f>Sheet1!$A$2:$A$5</c:f>
+              <c:strCache>
+                <c:ptCount val="4"/>
+                <c:pt idx="0">
+                  <c:v>binary AUC</c:v>
+                </c:pt>
+                <c:pt idx="1">
+                  <c:v>accuracy</c:v>
+                </c:pt>
+                <c:pt idx="2">
+                  <c:v>type accuracy</c:v>
+                </c:pt>
+                <c:pt idx="3">
+                  <c:v>macro F1</c:v>
+                </c:pt>
+              </c:strCache>
+            </c:strRef>
+          </c:cat>
+          <c:val>
+            <c:numRef>
+              <c:f>Sheet1!$C$2:$C$5</c:f>
+              <c:numCache>
+                <c:formatCode>0.000</c:formatCode>
+                <c:ptCount val="4"/>
+                <c:pt idx="0">
+                  <c:v>0.9649</c:v>
+                </c:pt>
+                <c:pt idx="1">
+                  <c:v>0.6552</c:v>
+                </c:pt>
+                <c:pt idx="2">
+                  <c:v>0.4214</c:v>
+                </c:pt>
+                <c:pt idx="3">
+                  <c:v>0.3645</c:v>
+                </c:pt>
+              </c:numCache>
+            </c:numRef>
+          </c:val>
+        </c:ser>
+        <c:ser>
+          <c:idx val="2"/>
+          <c:order val="2"/>
+          <c:tx>
+            <c:strRef>
+              <c:f>Sheet1!$D$1</c:f>
+              <c:strCache>
+                <c:ptCount val="1"/>
+                <c:pt idx="0">
+                  <c:v>VideoMAE ViT-L (frozen, final)</c:v>
+                </c:pt>
+              </c:strCache>
+            </c:strRef>
+          </c:tx>
+          <c:spPr>
+            <a:solidFill>
+              <a:srgbClr val="C16B2E"/>
+            </a:solidFill>
+          </c:spPr>
+          <c:cat>
+            <c:strRef>
+              <c:f>Sheet1!$A$2:$A$5</c:f>
+              <c:strCache>
+                <c:ptCount val="4"/>
+                <c:pt idx="0">
+                  <c:v>binary AUC</c:v>
+                </c:pt>
+                <c:pt idx="1">
+                  <c:v>accuracy</c:v>
+                </c:pt>
+                <c:pt idx="2">
+                  <c:v>type accuracy</c:v>
+                </c:pt>
+                <c:pt idx="3">
+                  <c:v>macro F1</c:v>
+                </c:pt>
+              </c:strCache>
+            </c:strRef>
+          </c:cat>
+          <c:val>
+            <c:numRef>
+              <c:f>Sheet1!$D$2:$D$5</c:f>
+              <c:numCache>
+                <c:formatCode>0.000</c:formatCode>
+                <c:ptCount val="4"/>
+                <c:pt idx="0">
+                  <c:v>0.961</c:v>
+                </c:pt>
+                <c:pt idx="1">
+                  <c:v>0.6897</c:v>
+                </c:pt>
+                <c:pt idx="2">
+                  <c:v>0.5</c:v>
+                </c:pt>
+                <c:pt idx="3">
+                  <c:v>0.4298</c:v>
+                </c:pt>
+              </c:numCache>
+            </c:numRef>
+          </c:val>
+        </c:ser>
+        <c:dLbls>
+          <c:numFmt formatCode="0.000" sourceLinked="0"/>
+          <c:txPr>
+            <a:bodyPr/>
+            <a:lstStyle/>
+            <a:p>
+              <a:pPr>
+                <a:defRPr sz="800">
+                  <a:solidFill>
+                    <a:srgbClr val="1B2236"/>
+                  </a:solidFill>
+                </a:defRPr>
+              </a:pPr>
+            </a:p>
+          </c:txPr>
+          <c:showLegendKey val="0"/>
+          <c:showVal val="1"/>
+          <c:showCatName val="0"/>
+          <c:showSerName val="0"/>
+          <c:showPercent val="0"/>
+          <c:showBubbleSize val="0"/>
+          <c:showLeaderLines val="1"/>
+        </c:dLbls>
+        <c:gapWidth val="60"/>
+        <c:axId val="-2068027336"/>
+        <c:axId val="-2113994440"/>
+      </c:barChart>
+      <c:catAx>
+        <c:axId val="-2068027336"/>
+        <c:scaling>
+          <c:orientation val="minMax"/>
+        </c:scaling>
+        <c:delete val="0"/>
+        <c:axPos val="b"/>
+        <c:majorTickMark val="out"/>
+        <c:minorTickMark val="none"/>
+        <c:tickLblPos val="nextTo"/>
+        <c:txPr>
+          <a:bodyPr/>
+          <a:lstStyle/>
+          <a:p>
+            <a:pPr>
+              <a:defRPr sz="900">
+                <a:solidFill>
+                  <a:srgbClr val="1B2236"/>
+                </a:solidFill>
+              </a:defRPr>
+            </a:pPr>
+          </a:p>
+        </c:txPr>
+        <c:crossAx val="-2113994440"/>
+        <c:crosses val="autoZero"/>
+        <c:auto val="1"/>
+        <c:lblAlgn val="ctr"/>
+        <c:lblOffset val="100"/>
+        <c:noMultiLvlLbl val="0"/>
+      </c:catAx>
+      <c:valAx>
+        <c:axId val="-2113994440"/>
+        <c:scaling/>
+        <c:delete val="0"/>
+        <c:axPos val="l"/>
+        <c:majorGridlines/>
+        <c:majorTickMark val="out"/>
+        <c:minorTickMark val="none"/>
+        <c:tickLblPos val="nextTo"/>
+        <c:txPr>
+          <a:bodyPr/>
+          <a:lstStyle/>
+          <a:p>
+            <a:pPr>
+              <a:defRPr sz="900">
+                <a:solidFill>
+                  <a:srgbClr val="1B2236"/>
+                </a:solidFill>
+              </a:defRPr>
+            </a:pPr>
+          </a:p>
+        </c:txPr>
+        <c:crossAx val="-2068027336"/>
+        <c:crosses val="autoZero"/>
+      </c:valAx>
+    </c:plotArea>
+    <c:legend>
+      <c:legendPos val="t"/>
+      <c:overlay val="0"/>
+      <c:txPr>
+        <a:bodyPr/>
+        <a:lstStyle/>
+        <a:p>
+          <a:pPr>
+            <a:defRPr sz="900"/>
+          </a:pPr>
+        </a:p>
+      </c:txPr>
+    </c:legend>
+    <c:dispBlanksAs val="gap"/>
+  </c:chart>
+  <c:txPr>
+    <a:bodyPr/>
+    <a:lstStyle/>
+    <a:p>
+      <a:pPr>
+        <a:defRPr sz="1800"/>
+      </a:pPr>
+      <a:endParaRPr lang="en-US"/>
+    </a:p>
+  </c:txPr>
+  <c:externalData r:id="rId1">
+    <c:autoUpdate val="0"/>
+  </c:externalData>
+</c:chartSpace>
+</file>
+
+<file path=ppt/charts/chart3.xml><?xml version="1.0" encoding="utf-8"?>
+<c:chartSpace xmlns:c="http://schemas.openxmlformats.org/drawingml/2006/chart" xmlns:a="http://schemas.openxmlformats.org/drawingml/2006/main" xmlns:r="http://schemas.openxmlformats.org/officeDocument/2006/relationships">
+  <c:date1904 val="0"/>
+  <c:chart>
+    <c:autoTitleDeleted val="0"/>
+    <c:plotArea>
+      <c:barChart>
+        <c:barDir val="bar"/>
+        <c:grouping val="stacked"/>
+        <c:ser>
+          <c:idx val="0"/>
+          <c:order val="0"/>
+          <c:tx>
+            <c:strRef>
+              <c:f>Sheet1!$B$1</c:f>
+              <c:strCache>
+                <c:ptCount val="1"/>
+                <c:pt idx="0">
+                  <c:v>start</c:v>
+                </c:pt>
+              </c:strCache>
+            </c:strRef>
+          </c:tx>
+          <c:spPr>
+            <a:solidFill>
+              <a:srgbClr val="FFFFFF"/>
+            </a:solidFill>
+          </c:spPr>
+          <c:dLbls>
+            <c:delete val="1"/>
+          </c:dLbls>
+          <c:cat>
+            <c:strRef>
+              <c:f>Sheet1!$A$2:$A$3</c:f>
+              <c:strCache>
+                <c:ptCount val="2"/>
+                <c:pt idx="0">
+                  <c:v>VideoMAE ViT-B (5 seeds)</c:v>
+                </c:pt>
+                <c:pt idx="1">
+                  <c:v>VideoMAE ViT-L (5 seeds)</c:v>
+                </c:pt>
+              </c:strCache>
+            </c:strRef>
+          </c:cat>
+          <c:val>
+            <c:numRef>
+              <c:f>Sheet1!$B$2:$B$3</c:f>
+              <c:numCache>
+                <c:formatCode>0.000</c:formatCode>
+                <c:ptCount val="2"/>
+                <c:pt idx="0">
+                  <c:v>0.31</c:v>
+                </c:pt>
+                <c:pt idx="1">
+                  <c:v>0.37</c:v>
+                </c:pt>
+              </c:numCache>
+            </c:numRef>
+          </c:val>
+        </c:ser>
+        <c:ser>
+          <c:idx val="1"/>
+          <c:order val="1"/>
+          <c:tx>
+            <c:strRef>
+              <c:f>Sheet1!$C$1</c:f>
+              <c:strCache>
+                <c:ptCount val="1"/>
+                <c:pt idx="0">
+                  <c:v>macro F1 range</c:v>
+                </c:pt>
+              </c:strCache>
+            </c:strRef>
+          </c:tx>
+          <c:spPr>
+            <a:solidFill>
+              <a:srgbClr val="C16B2E"/>
+            </a:solidFill>
+          </c:spPr>
+          <c:cat>
+            <c:strRef>
+              <c:f>Sheet1!$A$2:$A$3</c:f>
+              <c:strCache>
+                <c:ptCount val="2"/>
+                <c:pt idx="0">
+                  <c:v>VideoMAE ViT-B (5 seeds)</c:v>
+                </c:pt>
+                <c:pt idx="1">
+                  <c:v>VideoMAE ViT-L (5 seeds)</c:v>
+                </c:pt>
+              </c:strCache>
+            </c:strRef>
+          </c:cat>
+          <c:val>
+            <c:numRef>
+              <c:f>Sheet1!$C$2:$C$3</c:f>
+              <c:numCache>
+                <c:formatCode>0.000</c:formatCode>
+                <c:ptCount val="2"/>
+                <c:pt idx="0">
+                  <c:v>0.044</c:v>
+                </c:pt>
+                <c:pt idx="1">
+                  <c:v>0.053</c:v>
+                </c:pt>
+              </c:numCache>
+            </c:numRef>
+          </c:val>
+        </c:ser>
+        <c:dLbls>
+          <c:numFmt formatCode="0.000" sourceLinked="0"/>
+          <c:txPr>
+            <a:bodyPr/>
+            <a:lstStyle/>
+            <a:p>
+              <a:pPr>
+                <a:defRPr sz="800">
+                  <a:solidFill>
+                    <a:srgbClr val="1B2236"/>
+                  </a:solidFill>
+                </a:defRPr>
+              </a:pPr>
+            </a:p>
+          </c:txPr>
+          <c:showLegendKey val="0"/>
+          <c:showVal val="1"/>
+          <c:showCatName val="0"/>
+          <c:showSerName val="0"/>
+          <c:showPercent val="0"/>
+          <c:showBubbleSize val="0"/>
+          <c:showLeaderLines val="1"/>
+        </c:dLbls>
+        <c:gapWidth val="60"/>
+        <c:overlap val="100"/>
+        <c:axId val="-2068027336"/>
+        <c:axId val="-2113994440"/>
+      </c:barChart>
+      <c:catAx>
+        <c:axId val="-2068027336"/>
+        <c:scaling>
+          <c:orientation val="minMax"/>
+        </c:scaling>
+        <c:delete val="0"/>
+        <c:axPos val="l"/>
+        <c:majorTickMark val="out"/>
+        <c:minorTickMark val="none"/>
+        <c:tickLblPos val="nextTo"/>
+        <c:txPr>
+          <a:bodyPr/>
+          <a:lstStyle/>
+          <a:p>
+            <a:pPr>
+              <a:defRPr sz="900">
+                <a:solidFill>
+                  <a:srgbClr val="1B2236"/>
+                </a:solidFill>
+              </a:defRPr>
+            </a:pPr>
+          </a:p>
+        </c:txPr>
+        <c:crossAx val="-2113994440"/>
+        <c:crosses val="autoZero"/>
+        <c:auto val="1"/>
+        <c:lblAlgn val="ctr"/>
+        <c:lblOffset val="100"/>
+        <c:noMultiLvlLbl val="0"/>
+      </c:catAx>
+      <c:valAx>
+        <c:axId val="-2113994440"/>
+        <c:scaling/>
+        <c:delete val="0"/>
+        <c:axPos val="b"/>
+        <c:majorGridlines/>
+        <c:majorTickMark val="out"/>
+        <c:minorTickMark val="none"/>
+        <c:tickLblPos val="nextTo"/>
+        <c:txPr>
+          <a:bodyPr/>
+          <a:lstStyle/>
+          <a:p>
+            <a:pPr>
+              <a:defRPr sz="900">
+                <a:solidFill>
+                  <a:srgbClr val="1B2236"/>
+                </a:solidFill>
+              </a:defRPr>
+            </a:pPr>
+          </a:p>
+        </c:txPr>
+        <c:crossAx val="-2068027336"/>
+        <c:crosses val="autoZero"/>
+      </c:valAx>
+    </c:plotArea>
+    <c:dispBlanksAs val="gap"/>
+  </c:chart>
+  <c:txPr>
+    <a:bodyPr/>
+    <a:lstStyle/>
+    <a:p>
+      <a:pPr>
+        <a:defRPr sz="1800"/>
+      </a:pPr>
+      <a:endParaRPr lang="en-US"/>
+    </a:p>
+  </c:txPr>
+  <c:externalData r:id="rId1">
+    <c:autoUpdate val="0"/>
+  </c:externalData>
+</c:chartSpace>
+</file>
+
+<file path=ppt/charts/chart4.xml><?xml version="1.0" encoding="utf-8"?>
+<c:chartSpace xmlns:c="http://schemas.openxmlformats.org/drawingml/2006/chart" xmlns:a="http://schemas.openxmlformats.org/drawingml/2006/main" xmlns:r="http://schemas.openxmlformats.org/officeDocument/2006/relationships">
+  <c:date1904 val="0"/>
+  <c:chart>
+    <c:autoTitleDeleted val="0"/>
+    <c:plotArea>
+      <c:barChart>
+        <c:barDir val="col"/>
+        <c:grouping val="clustered"/>
+        <c:ser>
+          <c:idx val="0"/>
+          <c:order val="0"/>
+          <c:tx>
+            <c:strRef>
+              <c:f>Sheet1!$B$1</c:f>
+              <c:strCache>
+                <c:ptCount val="1"/>
+                <c:pt idx="0">
+                  <c:v>macro F1</c:v>
+                </c:pt>
+              </c:strCache>
+            </c:strRef>
+          </c:tx>
+          <c:spPr>
+            <a:solidFill>
+              <a:srgbClr val="2E5E8C"/>
+            </a:solidFill>
+          </c:spPr>
+          <c:cat>
+            <c:strRef>
+              <c:f>Sheet1!$A$2:$A$6</c:f>
+              <c:strCache>
+                <c:ptCount val="5"/>
+                <c:pt idx="0">
+                  <c:v>baseline</c:v>
+                </c:pt>
+                <c:pt idx="1">
+                  <c:v>mixup 0.2</c:v>
+                </c:pt>
+                <c:pt idx="2">
+                  <c:v>mixup 0.2 + adjust</c:v>
+                </c:pt>
+                <c:pt idx="3">
+                  <c:v>mixup 0.4 + adjust</c:v>
+                </c:pt>
+                <c:pt idx="4">
+                  <c:v>mixup 0.4</c:v>
+                </c:pt>
+              </c:strCache>
+            </c:strRef>
+          </c:cat>
+          <c:val>
+            <c:numRef>
+              <c:f>Sheet1!$B$2:$B$6</c:f>
+              <c:numCache>
+                <c:formatCode>0.0000</c:formatCode>
+                <c:ptCount val="5"/>
+                <c:pt idx="0">
+                  <c:v>0.4122</c:v>
+                </c:pt>
+                <c:pt idx="1">
+                  <c:v>0.4161</c:v>
+                </c:pt>
+                <c:pt idx="2">
+                  <c:v>0.4298</c:v>
+                </c:pt>
+                <c:pt idx="3">
+                  <c:v>0.4248</c:v>
+                </c:pt>
+                <c:pt idx="4">
+                  <c:v>0.4025</c:v>
+                </c:pt>
+              </c:numCache>
+            </c:numRef>
+          </c:val>
+        </c:ser>
+        <c:ser>
+          <c:idx val="1"/>
+          <c:order val="1"/>
+          <c:tx>
+            <c:strRef>
+              <c:f>Sheet1!$C$1</c:f>
+              <c:strCache>
+                <c:ptCount val="1"/>
+                <c:pt idx="0">
+                  <c:v>anomaly-type accuracy</c:v>
+                </c:pt>
+              </c:strCache>
+            </c:strRef>
+          </c:tx>
+          <c:spPr>
+            <a:solidFill>
+              <a:srgbClr val="6A748C"/>
+            </a:solidFill>
+          </c:spPr>
+          <c:cat>
+            <c:strRef>
+              <c:f>Sheet1!$A$2:$A$6</c:f>
+              <c:strCache>
+                <c:ptCount val="5"/>
+                <c:pt idx="0">
+                  <c:v>baseline</c:v>
+                </c:pt>
+                <c:pt idx="1">
+                  <c:v>mixup 0.2</c:v>
+                </c:pt>
+                <c:pt idx="2">
+                  <c:v>mixup 0.2 + adjust</c:v>
+                </c:pt>
+                <c:pt idx="3">
+                  <c:v>mixup 0.4 + adjust</c:v>
+                </c:pt>
+                <c:pt idx="4">
+                  <c:v>mixup 0.4</c:v>
+                </c:pt>
+              </c:strCache>
+            </c:strRef>
+          </c:cat>
+          <c:val>
+            <c:numRef>
+              <c:f>Sheet1!$C$2:$C$6</c:f>
+              <c:numCache>
+                <c:formatCode>0.0000</c:formatCode>
+                <c:ptCount val="5"/>
+                <c:pt idx="0">
+                  <c:v>0.4786</c:v>
+                </c:pt>
+                <c:pt idx="1">
+                  <c:v>0.4714</c:v>
+                </c:pt>
+                <c:pt idx="2">
+                  <c:v>0.5</c:v>
+                </c:pt>
+                <c:pt idx="3">
+                  <c:v>0.4929</c:v>
+                </c:pt>
+                <c:pt idx="4">
+                  <c:v>0.4643</c:v>
+                </c:pt>
+              </c:numCache>
+            </c:numRef>
+          </c:val>
+        </c:ser>
+        <c:dLbls>
+          <c:numFmt formatCode="0.0000" sourceLinked="0"/>
+          <c:txPr>
+            <a:bodyPr/>
+            <a:lstStyle/>
+            <a:p>
+              <a:pPr>
+                <a:defRPr sz="800">
+                  <a:solidFill>
+                    <a:srgbClr val="1B2236"/>
+                  </a:solidFill>
+                </a:defRPr>
+              </a:pPr>
+            </a:p>
+          </c:txPr>
+          <c:showLegendKey val="0"/>
+          <c:showVal val="1"/>
+          <c:showCatName val="0"/>
+          <c:showSerName val="0"/>
+          <c:showPercent val="0"/>
+          <c:showBubbleSize val="0"/>
+          <c:showLeaderLines val="1"/>
+        </c:dLbls>
+        <c:gapWidth val="60"/>
+        <c:axId val="-2068027336"/>
+        <c:axId val="-2113994440"/>
+      </c:barChart>
+      <c:catAx>
+        <c:axId val="-2068027336"/>
+        <c:scaling>
+          <c:orientation val="minMax"/>
+        </c:scaling>
+        <c:delete val="0"/>
+        <c:axPos val="b"/>
+        <c:majorTickMark val="out"/>
+        <c:minorTickMark val="none"/>
+        <c:tickLblPos val="nextTo"/>
+        <c:txPr>
+          <a:bodyPr/>
+          <a:lstStyle/>
+          <a:p>
+            <a:pPr>
+              <a:defRPr sz="900">
+                <a:solidFill>
+                  <a:srgbClr val="1B2236"/>
+                </a:solidFill>
+              </a:defRPr>
+            </a:pPr>
+          </a:p>
+        </c:txPr>
+        <c:crossAx val="-2113994440"/>
+        <c:crosses val="autoZero"/>
+        <c:auto val="1"/>
+        <c:lblAlgn val="ctr"/>
+        <c:lblOffset val="100"/>
+        <c:noMultiLvlLbl val="0"/>
+      </c:catAx>
+      <c:valAx>
+        <c:axId val="-2113994440"/>
+        <c:scaling/>
+        <c:delete val="0"/>
+        <c:axPos val="l"/>
+        <c:majorGridlines/>
+        <c:majorTickMark val="out"/>
+        <c:minorTickMark val="none"/>
+        <c:tickLblPos val="nextTo"/>
+        <c:txPr>
+          <a:bodyPr/>
+          <a:lstStyle/>
+          <a:p>
+            <a:pPr>
+              <a:defRPr sz="900">
+                <a:solidFill>
+                  <a:srgbClr val="1B2236"/>
+                </a:solidFill>
+              </a:defRPr>
+            </a:pPr>
+          </a:p>
+        </c:txPr>
+        <c:crossAx val="-2068027336"/>
+        <c:crosses val="autoZero"/>
+      </c:valAx>
+    </c:plotArea>
+    <c:legend>
+      <c:legendPos val="t"/>
+      <c:overlay val="0"/>
+      <c:txPr>
+        <a:bodyPr/>
+        <a:lstStyle/>
+        <a:p>
+          <a:pPr>
+            <a:defRPr sz="900"/>
+          </a:pPr>
+        </a:p>
+      </c:txPr>
+    </c:legend>
+    <c:dispBlanksAs val="gap"/>
+  </c:chart>
+  <c:txPr>
+    <a:bodyPr/>
+    <a:lstStyle/>
+    <a:p>
+      <a:pPr>
+        <a:defRPr sz="1800"/>
+      </a:pPr>
+      <a:endParaRPr lang="en-US"/>
+    </a:p>
+  </c:txPr>
+  <c:externalData r:id="rId1">
+    <c:autoUpdate val="0"/>
+  </c:externalData>
+</c:chartSpace>
+</file>
+
+<file path=ppt/charts/chart5.xml><?xml version="1.0" encoding="utf-8"?>
+<c:chartSpace xmlns:c="http://schemas.openxmlformats.org/drawingml/2006/chart" xmlns:a="http://schemas.openxmlformats.org/drawingml/2006/main" xmlns:r="http://schemas.openxmlformats.org/officeDocument/2006/relationships">
+  <c:date1904 val="0"/>
+  <c:chart>
+    <c:autoTitleDeleted val="0"/>
+    <c:plotArea>
+      <c:barChart>
+        <c:barDir val="bar"/>
+        <c:grouping val="stacked"/>
+        <c:ser>
+          <c:idx val="0"/>
+          <c:order val="0"/>
+          <c:tx>
+            <c:strRef>
+              <c:f>Sheet1!$B$1</c:f>
+              <c:strCache>
+                <c:ptCount val="1"/>
+                <c:pt idx="0">
+                  <c:v>lower bound</c:v>
+                </c:pt>
+              </c:strCache>
+            </c:strRef>
+          </c:tx>
+          <c:spPr>
+            <a:solidFill>
+              <a:srgbClr val="FFFFFF"/>
+            </a:solidFill>
+          </c:spPr>
+          <c:dLbls>
+            <c:delete val="1"/>
+          </c:dLbls>
+          <c:cat>
+            <c:strRef>
+              <c:f>Sheet1!$A$2:$A$5</c:f>
+              <c:strCache>
+                <c:ptCount val="4"/>
+                <c:pt idx="0">
+                  <c:v>binary AUC</c:v>
+                </c:pt>
+                <c:pt idx="1">
+                  <c:v>accuracy</c:v>
+                </c:pt>
+                <c:pt idx="2">
+                  <c:v>type accuracy</c:v>
+                </c:pt>
+                <c:pt idx="3">
+                  <c:v>macro F1</c:v>
+                </c:pt>
+              </c:strCache>
+            </c:strRef>
+          </c:cat>
+          <c:val>
+            <c:numRef>
+              <c:f>Sheet1!$B$2:$B$5</c:f>
+              <c:numCache>
+                <c:formatCode>0.000</c:formatCode>
+                <c:ptCount val="4"/>
+                <c:pt idx="0">
+                  <c:v>0.938</c:v>
+                </c:pt>
+                <c:pt idx="1">
+                  <c:v>0.635</c:v>
+                </c:pt>
+                <c:pt idx="2">
+                  <c:v>0.42</c:v>
+                </c:pt>
+                <c:pt idx="3">
+                  <c:v>0.339</c:v>
+                </c:pt>
+              </c:numCache>
+            </c:numRef>
+          </c:val>
+        </c:ser>
+        <c:ser>
+          <c:idx val="1"/>
+          <c:order val="1"/>
+          <c:tx>
+            <c:strRef>
+              <c:f>Sheet1!$C$1</c:f>
+              <c:strCache>
+                <c:ptCount val="1"/>
+                <c:pt idx="0">
+                  <c:v>95% confidence interval</c:v>
+                </c:pt>
+              </c:strCache>
+            </c:strRef>
+          </c:tx>
+          <c:spPr>
+            <a:solidFill>
+              <a:srgbClr val="2E5E8C"/>
+            </a:solidFill>
+          </c:spPr>
+          <c:cat>
+            <c:strRef>
+              <c:f>Sheet1!$A$2:$A$5</c:f>
+              <c:strCache>
+                <c:ptCount val="4"/>
+                <c:pt idx="0">
+                  <c:v>binary AUC</c:v>
+                </c:pt>
+                <c:pt idx="1">
+                  <c:v>accuracy</c:v>
+                </c:pt>
+                <c:pt idx="2">
+                  <c:v>type accuracy</c:v>
+                </c:pt>
+                <c:pt idx="3">
+                  <c:v>macro F1</c:v>
+                </c:pt>
+              </c:strCache>
+            </c:strRef>
+          </c:cat>
+          <c:val>
+            <c:numRef>
+              <c:f>Sheet1!$C$2:$C$5</c:f>
+              <c:numCache>
+                <c:formatCode>0.000</c:formatCode>
+                <c:ptCount val="4"/>
+                <c:pt idx="0">
+                  <c:v>0.042</c:v>
+                </c:pt>
+                <c:pt idx="1">
+                  <c:v>0.11</c:v>
+                </c:pt>
+                <c:pt idx="2">
+                  <c:v>0.165</c:v>
+                </c:pt>
+                <c:pt idx="3">
+                  <c:v>0.164</c:v>
+                </c:pt>
+              </c:numCache>
+            </c:numRef>
+          </c:val>
+        </c:ser>
+        <c:dLbls>
+          <c:numFmt formatCode="0.000" sourceLinked="0"/>
+          <c:txPr>
+            <a:bodyPr/>
+            <a:lstStyle/>
+            <a:p>
+              <a:pPr>
+                <a:defRPr sz="800">
+                  <a:solidFill>
+                    <a:srgbClr val="1B2236"/>
+                  </a:solidFill>
+                </a:defRPr>
+              </a:pPr>
+            </a:p>
+          </c:txPr>
+          <c:showLegendKey val="0"/>
+          <c:showVal val="1"/>
+          <c:showCatName val="0"/>
+          <c:showSerName val="0"/>
+          <c:showPercent val="0"/>
+          <c:showBubbleSize val="0"/>
+          <c:showLeaderLines val="1"/>
+        </c:dLbls>
+        <c:gapWidth val="60"/>
+        <c:overlap val="100"/>
+        <c:axId val="-2068027336"/>
+        <c:axId val="-2113994440"/>
+      </c:barChart>
+      <c:catAx>
+        <c:axId val="-2068027336"/>
+        <c:scaling>
+          <c:orientation val="minMax"/>
+        </c:scaling>
+        <c:delete val="0"/>
+        <c:axPos val="l"/>
+        <c:majorTickMark val="out"/>
+        <c:minorTickMark val="none"/>
+        <c:tickLblPos val="nextTo"/>
+        <c:txPr>
+          <a:bodyPr/>
+          <a:lstStyle/>
+          <a:p>
+            <a:pPr>
+              <a:defRPr sz="900">
+                <a:solidFill>
+                  <a:srgbClr val="1B2236"/>
+                </a:solidFill>
+              </a:defRPr>
+            </a:pPr>
+          </a:p>
+        </c:txPr>
+        <c:crossAx val="-2113994440"/>
+        <c:crosses val="autoZero"/>
+        <c:auto val="1"/>
+        <c:lblAlgn val="ctr"/>
+        <c:lblOffset val="100"/>
+        <c:noMultiLvlLbl val="0"/>
+      </c:catAx>
+      <c:valAx>
+        <c:axId val="-2113994440"/>
+        <c:scaling/>
+        <c:delete val="0"/>
+        <c:axPos val="b"/>
+        <c:majorGridlines/>
+        <c:majorTickMark val="out"/>
+        <c:minorTickMark val="none"/>
+        <c:tickLblPos val="nextTo"/>
+        <c:txPr>
+          <a:bodyPr/>
+          <a:lstStyle/>
+          <a:p>
+            <a:pPr>
+              <a:defRPr sz="900">
+                <a:solidFill>
+                  <a:srgbClr val="1B2236"/>
+                </a:solidFill>
+              </a:defRPr>
+            </a:pPr>
+          </a:p>
+        </c:txPr>
+        <c:crossAx val="-2068027336"/>
+        <c:crosses val="autoZero"/>
+      </c:valAx>
+    </c:plotArea>
+    <c:dispBlanksAs val="gap"/>
+  </c:chart>
+  <c:txPr>
+    <a:bodyPr/>
+    <a:lstStyle/>
+    <a:p>
+      <a:pPr>
+        <a:defRPr sz="1800"/>
+      </a:pPr>
+      <a:endParaRPr lang="en-US"/>
+    </a:p>
+  </c:txPr>
+  <c:externalData r:id="rId1">
+    <c:autoUpdate val="0"/>
+  </c:externalData>
+</c:chartSpace>
+</file>
+
+<file path=ppt/charts/chart6.xml><?xml version="1.0" encoding="utf-8"?>
+<c:chartSpace xmlns:c="http://schemas.openxmlformats.org/drawingml/2006/chart" xmlns:a="http://schemas.openxmlformats.org/drawingml/2006/main" xmlns:r="http://schemas.openxmlformats.org/officeDocument/2006/relationships">
+  <c:date1904 val="0"/>
+  <c:chart>
+    <c:autoTitleDeleted val="0"/>
+    <c:plotArea>
+      <c:lineChart>
+        <c:grouping val="standard"/>
+        <c:varyColors val="0"/>
+        <c:ser>
+          <c:idx val="0"/>
+          <c:order val="0"/>
+          <c:tx>
+            <c:strRef>
+              <c:f>Sheet1!$B$1</c:f>
+              <c:strCache>
+                <c:ptCount val="1"/>
+                <c:pt idx="0">
+                  <c:v>expected inflation of the best score</c:v>
+                </c:pt>
+              </c:strCache>
+            </c:strRef>
+          </c:tx>
+          <c:spPr>
+            <a:solidFill>
+              <a:srgbClr val="2E5E8C"/>
+            </a:solidFill>
+          </c:spPr>
+          <c:cat>
+            <c:strRef>
+              <c:f>Sheet1!$A$2:$A$12</c:f>
+              <c:strCache>
+                <c:ptCount val="11"/>
+                <c:pt idx="0">
+                  <c:v>2</c:v>
+                </c:pt>
+                <c:pt idx="1">
+                  <c:v>5</c:v>
+                </c:pt>
+                <c:pt idx="2">
+                  <c:v>8</c:v>
+                </c:pt>
+                <c:pt idx="3">
+                  <c:v>15</c:v>
+                </c:pt>
+                <c:pt idx="4">
+                  <c:v>25</c:v>
+                </c:pt>
+                <c:pt idx="5">
+                  <c:v>50</c:v>
+                </c:pt>
+                <c:pt idx="6">
+                  <c:v>75</c:v>
+                </c:pt>
+                <c:pt idx="7">
+                  <c:v>100</c:v>
+                </c:pt>
+                <c:pt idx="8">
+                  <c:v>150</c:v>
+                </c:pt>
+                <c:pt idx="9">
+                  <c:v>200</c:v>
+                </c:pt>
+                <c:pt idx="10">
+                  <c:v>250</c:v>
+                </c:pt>
+              </c:strCache>
+            </c:strRef>
+          </c:cat>
+          <c:val>
+            <c:numRef>
+              <c:f>Sheet1!$B$2:$B$12</c:f>
+              <c:numCache>
+                <c:formatCode>0.0000</c:formatCode>
+                <c:ptCount val="11"/>
+                <c:pt idx="0">
+                  <c:v>0.04</c:v>
+                </c:pt>
+                <c:pt idx="1">
+                  <c:v>0.061</c:v>
+                </c:pt>
+                <c:pt idx="2">
+                  <c:v>0.0693</c:v>
+                </c:pt>
+                <c:pt idx="3">
+                  <c:v>0.0791</c:v>
+                </c:pt>
+                <c:pt idx="4">
+                  <c:v>0.0863</c:v>
+                </c:pt>
+                <c:pt idx="5">
+                  <c:v>0.0951</c:v>
+                </c:pt>
+                <c:pt idx="6">
+                  <c:v>0.0999</c:v>
+                </c:pt>
+                <c:pt idx="7">
+                  <c:v>0.1032</c:v>
+                </c:pt>
+                <c:pt idx="8">
+                  <c:v>0.1076</c:v>
+                </c:pt>
+                <c:pt idx="9">
+                  <c:v>0.1107</c:v>
+                </c:pt>
+                <c:pt idx="10">
+                  <c:v>0.113</c:v>
+                </c:pt>
+              </c:numCache>
+            </c:numRef>
+          </c:val>
+          <c:smooth val="0"/>
+        </c:ser>
+        <c:dLbls>
+          <c:numFmt formatCode="0.0000" sourceLinked="0"/>
+          <c:txPr>
+            <a:bodyPr/>
+            <a:lstStyle/>
+            <a:p>
+              <a:pPr>
+                <a:defRPr sz="800">
+                  <a:solidFill>
+                    <a:srgbClr val="1B2236"/>
+                  </a:solidFill>
+                </a:defRPr>
+              </a:pPr>
+            </a:p>
+          </c:txPr>
+          <c:showLegendKey val="0"/>
+          <c:showVal val="1"/>
+          <c:showCatName val="0"/>
+          <c:showSerName val="0"/>
+          <c:showPercent val="0"/>
+          <c:showBubbleSize val="0"/>
+          <c:showLeaderLines val="1"/>
+        </c:dLbls>
+        <c:marker val="1"/>
+        <c:smooth val="0"/>
+        <c:axId val="2118791784"/>
+        <c:axId val="2140495176"/>
+      </c:lineChart>
+      <c:catAx>
+        <c:axId val="2118791784"/>
+        <c:scaling>
+          <c:orientation val="minMax"/>
+        </c:scaling>
+        <c:delete val="0"/>
+        <c:axPos val="b"/>
+        <c:majorTickMark val="out"/>
+        <c:minorTickMark val="none"/>
+        <c:tickLblPos val="nextTo"/>
+        <c:txPr>
+          <a:bodyPr/>
+          <a:lstStyle/>
+          <a:p>
+            <a:pPr>
+              <a:defRPr sz="900">
+                <a:solidFill>
+                  <a:srgbClr val="1B2236"/>
+                </a:solidFill>
+              </a:defRPr>
+            </a:pPr>
+          </a:p>
+        </c:txPr>
+        <c:crossAx val="2140495176"/>
+        <c:crosses val="autoZero"/>
+        <c:auto val="1"/>
+        <c:lblAlgn val="ctr"/>
+        <c:lblOffset val="100"/>
+        <c:noMultiLvlLbl val="0"/>
+      </c:catAx>
+      <c:valAx>
+        <c:axId val="2140495176"/>
+        <c:scaling/>
+        <c:delete val="0"/>
+        <c:axPos val="l"/>
+        <c:majorGridlines/>
+        <c:majorTickMark val="out"/>
+        <c:minorTickMark val="none"/>
+        <c:tickLblPos val="nextTo"/>
+        <c:txPr>
+          <a:bodyPr/>
+          <a:lstStyle/>
+          <a:p>
+            <a:pPr>
+              <a:defRPr sz="900">
+                <a:solidFill>
+                  <a:srgbClr val="1B2236"/>
+                </a:solidFill>
+              </a:defRPr>
+            </a:pPr>
+          </a:p>
+        </c:txPr>
+        <c:crossAx val="2118791784"/>
+        <c:crosses val="autoZero"/>
+      </c:valAx>
+    </c:plotArea>
+    <c:plotVisOnly val="1"/>
+    <c:dispBlanksAs val="gap"/>
+    <c:showDLblsOverMax val="0"/>
+  </c:chart>
+  <c:txPr>
+    <a:bodyPr/>
+    <a:lstStyle/>
+    <a:p>
+      <a:pPr>
+        <a:defRPr sz="1800"/>
+      </a:pPr>
+      <a:endParaRPr lang="en-US"/>
+    </a:p>
+  </c:txPr>
+  <c:externalData r:id="rId1">
+    <c:autoUpdate val="0"/>
+  </c:externalData>
+</c:chartSpace>
 </file>
 
 <file path=ppt/slideLayouts/slideLayout1.xml><?xml version="1.0" encoding="utf-8"?>
@@ -3103,7 +4508,7 @@
         </p:nvSpPr>
         <p:spPr>
           <a:xfrm>
-            <a:off x="457200" y="274320"/>
+            <a:off x="457200" y="228600"/>
             <a:ext cx="11247120" cy="457200"/>
           </a:xfrm>
           <a:prstGeom prst="rect">
@@ -3112,7 +4517,7 @@
           <a:noFill/>
         </p:spPr>
         <p:txBody>
-          <a:bodyPr wrap="square">
+          <a:bodyPr wrap="none">
             <a:spAutoFit/>
           </a:bodyPr>
           <a:lstStyle/>
@@ -3138,8 +4543,8 @@
         </p:nvSpPr>
         <p:spPr>
           <a:xfrm>
-            <a:off x="457200" y="6309360"/>
-            <a:ext cx="11247120" cy="365760"/>
+            <a:off x="548640" y="914400"/>
+            <a:ext cx="11064240" cy="274320"/>
           </a:xfrm>
           <a:prstGeom prst="rect">
             <a:avLst/>
@@ -3152,49 +4557,1075 @@
           </a:bodyPr>
           <a:lstStyle/>
           <a:p>
-            <a:pPr rtl="1" algn="r"/>
-            <a:r>
-              <a:rPr sz="1100" b="0">
+            <a:pPr algn="ctr"/>
+            <a:r>
+              <a:rPr sz="1000" i="1">
                 <a:solidFill>
                   <a:srgbClr val="6A748C"/>
                 </a:solidFill>
-                <a:latin typeface="B Nazanin"/>
+                <a:latin typeface="Calibri"/>
               </a:rPr>
-              <a:t>برای ویرایش: راست‌کلیک روی شکل ← Convert to Shape   |   فایل برداری: figures/fig_pipeline.svg</a:t>
-            </a:r>
-          </a:p>
-        </p:txBody>
-      </p:sp>
-      <p:pic>
-        <p:nvPicPr>
-          <p:cNvPr id="4" name="Picture 3" descr="fig_pipeline.png"/>
-          <p:cNvPicPr>
-            <a:picLocks noChangeAspect="1"/>
-          </p:cNvPicPr>
+              <a:t>Stage 1  -  run once, 150 min for 1895 videos</a:t>
+            </a:r>
+          </a:p>
+        </p:txBody>
+      </p:sp>
+      <p:sp>
+        <p:nvSpPr>
+          <p:cNvPr id="4" name="Rounded Rectangle 3"/>
+          <p:cNvSpPr/>
           <p:nvPr/>
-        </p:nvPicPr>
-        <p:blipFill>
-          <a:blip r:embed="rId2">
-            <a:extLst>
-              <a:ext uri="{96DAC541-7B7A-43D3-8B79-37D633B846F1}">
-                <ns2:svgBlip xmlns:ns2="http://schemas.microsoft.com/office/drawing/2016/SVG/main" r:embed="rId3"/>
-              </a:ext>
-            </a:extLst>
-          </a:blip>
-          <a:stretch>
-            <a:fillRect/>
-          </a:stretch>
-        </p:blipFill>
+        </p:nvSpPr>
         <p:spPr>
           <a:xfrm>
-            <a:off x="1030883" y="914400"/>
-            <a:ext cx="10129929" cy="5212079"/>
+            <a:off x="548640" y="1325880"/>
+            <a:ext cx="2377440" cy="1188720"/>
+          </a:xfrm>
+          <a:prstGeom prst="roundRect">
+            <a:avLst/>
+          </a:prstGeom>
+          <a:solidFill>
+            <a:srgbClr val="EEF3F7"/>
+          </a:solidFill>
+          <a:ln w="15875">
+            <a:solidFill>
+              <a:srgbClr val="2E5E8C"/>
+            </a:solidFill>
+          </a:ln>
+          <a:effectLst/>
+        </p:spPr>
+        <p:style>
+          <a:lnRef idx="1">
+            <a:schemeClr val="accent1"/>
+          </a:lnRef>
+          <a:fillRef idx="3">
+            <a:schemeClr val="accent1"/>
+          </a:fillRef>
+          <a:effectRef idx="2">
+            <a:schemeClr val="accent1"/>
+          </a:effectRef>
+          <a:fontRef idx="minor">
+            <a:schemeClr val="lt1"/>
+          </a:fontRef>
+        </p:style>
+        <p:txBody>
+          <a:bodyPr rtlCol="0" anchor="ctr" wrap="square" lIns="45720" rIns="45720"/>
+          <a:lstStyle/>
+          <a:p>
+            <a:pPr algn="ctr"/>
+            <a:r>
+              <a:rPr sz="1100">
+                <a:solidFill>
+                  <a:srgbClr val="1B2236"/>
+                </a:solidFill>
+                <a:latin typeface="Calibri"/>
+              </a:rPr>
+              <a:t>Surveillance video</a:t>
+            </a:r>
+          </a:p>
+          <a:p>
+            <a:pPr algn="ctr"/>
+            <a:r>
+              <a:rPr sz="1100">
+                <a:solidFill>
+                  <a:srgbClr val="1B2236"/>
+                </a:solidFill>
+                <a:latin typeface="Calibri"/>
+              </a:rPr>
+              <a:t>(untrimmed, one</a:t>
+            </a:r>
+          </a:p>
+          <a:p>
+            <a:pPr algn="ctr"/>
+            <a:r>
+              <a:rPr sz="1100">
+                <a:solidFill>
+                  <a:srgbClr val="1B2236"/>
+                </a:solidFill>
+                <a:latin typeface="Calibri"/>
+              </a:rPr>
+              <a:t>video-level label)</a:t>
+            </a:r>
+          </a:p>
+        </p:txBody>
+      </p:sp>
+      <p:sp>
+        <p:nvSpPr>
+          <p:cNvPr id="5" name="Rounded Rectangle 4"/>
+          <p:cNvSpPr/>
+          <p:nvPr/>
+        </p:nvSpPr>
+        <p:spPr>
+          <a:xfrm>
+            <a:off x="3429000" y="1325880"/>
+            <a:ext cx="2377440" cy="1188720"/>
+          </a:xfrm>
+          <a:prstGeom prst="roundRect">
+            <a:avLst/>
+          </a:prstGeom>
+          <a:solidFill>
+            <a:srgbClr val="EEF3F7"/>
+          </a:solidFill>
+          <a:ln w="15875">
+            <a:solidFill>
+              <a:srgbClr val="2E5E8C"/>
+            </a:solidFill>
+          </a:ln>
+          <a:effectLst/>
+        </p:spPr>
+        <p:style>
+          <a:lnRef idx="1">
+            <a:schemeClr val="accent1"/>
+          </a:lnRef>
+          <a:fillRef idx="3">
+            <a:schemeClr val="accent1"/>
+          </a:fillRef>
+          <a:effectRef idx="2">
+            <a:schemeClr val="accent1"/>
+          </a:effectRef>
+          <a:fontRef idx="minor">
+            <a:schemeClr val="lt1"/>
+          </a:fontRef>
+        </p:style>
+        <p:txBody>
+          <a:bodyPr rtlCol="0" anchor="ctr" wrap="square" lIns="45720" rIns="45720"/>
+          <a:lstStyle/>
+          <a:p>
+            <a:pPr algn="ctr"/>
+            <a:r>
+              <a:rPr sz="1100">
+                <a:solidFill>
+                  <a:srgbClr val="1B2236"/>
+                </a:solidFill>
+                <a:latin typeface="Calibri"/>
+              </a:rPr>
+              <a:t>16 clips</a:t>
+            </a:r>
+          </a:p>
+          <a:p>
+            <a:pPr algn="ctr"/>
+            <a:r>
+              <a:rPr sz="1100">
+                <a:solidFill>
+                  <a:srgbClr val="1B2236"/>
+                </a:solidFill>
+                <a:latin typeface="Calibri"/>
+              </a:rPr>
+              <a:t>16 frames each</a:t>
+            </a:r>
+          </a:p>
+          <a:p>
+            <a:pPr algn="ctr"/>
+            <a:r>
+              <a:rPr sz="1100">
+                <a:solidFill>
+                  <a:srgbClr val="1B2236"/>
+                </a:solidFill>
+                <a:latin typeface="Calibri"/>
+              </a:rPr>
+              <a:t>224x224</a:t>
+            </a:r>
+          </a:p>
+        </p:txBody>
+      </p:sp>
+      <p:sp>
+        <p:nvSpPr>
+          <p:cNvPr id="6" name="Rounded Rectangle 5"/>
+          <p:cNvSpPr/>
+          <p:nvPr/>
+        </p:nvSpPr>
+        <p:spPr>
+          <a:xfrm>
+            <a:off x="6309360" y="1325880"/>
+            <a:ext cx="2468880" cy="1188720"/>
+          </a:xfrm>
+          <a:prstGeom prst="roundRect">
+            <a:avLst/>
+          </a:prstGeom>
+          <a:solidFill>
+            <a:srgbClr val="F5EFE6"/>
+          </a:solidFill>
+          <a:ln w="15875">
+            <a:solidFill>
+              <a:srgbClr val="C16B2E"/>
+            </a:solidFill>
+          </a:ln>
+          <a:effectLst/>
+        </p:spPr>
+        <p:style>
+          <a:lnRef idx="1">
+            <a:schemeClr val="accent1"/>
+          </a:lnRef>
+          <a:fillRef idx="3">
+            <a:schemeClr val="accent1"/>
+          </a:fillRef>
+          <a:effectRef idx="2">
+            <a:schemeClr val="accent1"/>
+          </a:effectRef>
+          <a:fontRef idx="minor">
+            <a:schemeClr val="lt1"/>
+          </a:fontRef>
+        </p:style>
+        <p:txBody>
+          <a:bodyPr rtlCol="0" anchor="ctr" wrap="square" lIns="45720" rIns="45720"/>
+          <a:lstStyle/>
+          <a:p>
+            <a:pPr algn="ctr"/>
+            <a:r>
+              <a:rPr sz="1100">
+                <a:solidFill>
+                  <a:srgbClr val="1B2236"/>
+                </a:solidFill>
+                <a:latin typeface="Calibri"/>
+              </a:rPr>
+              <a:t>VideoMAE ViT-L</a:t>
+            </a:r>
+          </a:p>
+          <a:p>
+            <a:pPr algn="ctr"/>
+            <a:r>
+              <a:rPr sz="1100">
+                <a:solidFill>
+                  <a:srgbClr val="1B2236"/>
+                </a:solidFill>
+                <a:latin typeface="Calibri"/>
+              </a:rPr>
+              <a:t>(frozen, Kinetics)</a:t>
+            </a:r>
+          </a:p>
+          <a:p>
+            <a:pPr algn="ctr"/>
+            <a:r>
+              <a:rPr sz="1100">
+                <a:solidFill>
+                  <a:srgbClr val="1B2236"/>
+                </a:solidFill>
+                <a:latin typeface="Calibri"/>
+              </a:rPr>
+              <a:t>token mean-pool</a:t>
+            </a:r>
+          </a:p>
+        </p:txBody>
+      </p:sp>
+      <p:sp>
+        <p:nvSpPr>
+          <p:cNvPr id="7" name="Rounded Rectangle 6"/>
+          <p:cNvSpPr/>
+          <p:nvPr/>
+        </p:nvSpPr>
+        <p:spPr>
+          <a:xfrm>
+            <a:off x="9281160" y="1325880"/>
+            <a:ext cx="2377440" cy="1188720"/>
+          </a:xfrm>
+          <a:prstGeom prst="roundRect">
+            <a:avLst/>
+          </a:prstGeom>
+          <a:solidFill>
+            <a:srgbClr val="EEF3F7"/>
+          </a:solidFill>
+          <a:ln w="15875">
+            <a:solidFill>
+              <a:srgbClr val="2E5E8C"/>
+            </a:solidFill>
+          </a:ln>
+          <a:effectLst/>
+        </p:spPr>
+        <p:style>
+          <a:lnRef idx="1">
+            <a:schemeClr val="accent1"/>
+          </a:lnRef>
+          <a:fillRef idx="3">
+            <a:schemeClr val="accent1"/>
+          </a:fillRef>
+          <a:effectRef idx="2">
+            <a:schemeClr val="accent1"/>
+          </a:effectRef>
+          <a:fontRef idx="minor">
+            <a:schemeClr val="lt1"/>
+          </a:fontRef>
+        </p:style>
+        <p:txBody>
+          <a:bodyPr rtlCol="0" anchor="ctr" wrap="square" lIns="45720" rIns="45720"/>
+          <a:lstStyle/>
+          <a:p>
+            <a:pPr algn="ctr"/>
+            <a:r>
+              <a:rPr sz="1100">
+                <a:solidFill>
+                  <a:srgbClr val="1B2236"/>
+                </a:solidFill>
+                <a:latin typeface="Calibri"/>
+              </a:rPr>
+              <a:t>cached features</a:t>
+            </a:r>
+          </a:p>
+          <a:p>
+            <a:pPr algn="ctr"/>
+            <a:r>
+              <a:rPr sz="1100">
+                <a:solidFill>
+                  <a:srgbClr val="1B2236"/>
+                </a:solidFill>
+                <a:latin typeface="Calibri"/>
+              </a:rPr>
+              <a:t>[16, 1024]</a:t>
+            </a:r>
+          </a:p>
+          <a:p>
+            <a:pPr algn="ctr"/>
+            <a:r>
+              <a:rPr sz="1100">
+                <a:solidFill>
+                  <a:srgbClr val="1B2236"/>
+                </a:solidFill>
+                <a:latin typeface="Calibri"/>
+              </a:rPr>
+              <a:t>one .npy / video</a:t>
+            </a:r>
+          </a:p>
+        </p:txBody>
+      </p:sp>
+      <p:sp>
+        <p:nvSpPr>
+          <p:cNvPr id="8" name="Right Arrow 7"/>
+          <p:cNvSpPr/>
+          <p:nvPr/>
+        </p:nvSpPr>
+        <p:spPr>
+          <a:xfrm>
+            <a:off x="2999232" y="1828800"/>
+            <a:ext cx="365759" cy="201168"/>
+          </a:xfrm>
+          <a:prstGeom prst="rightArrow">
+            <a:avLst/>
+          </a:prstGeom>
+          <a:solidFill>
+            <a:srgbClr val="6A748C"/>
+          </a:solidFill>
+          <a:ln>
+            <a:noFill/>
+          </a:ln>
+          <a:effectLst/>
+        </p:spPr>
+        <p:style>
+          <a:lnRef idx="1">
+            <a:schemeClr val="accent1"/>
+          </a:lnRef>
+          <a:fillRef idx="3">
+            <a:schemeClr val="accent1"/>
+          </a:fillRef>
+          <a:effectRef idx="2">
+            <a:schemeClr val="accent1"/>
+          </a:effectRef>
+          <a:fontRef idx="minor">
+            <a:schemeClr val="lt1"/>
+          </a:fontRef>
+        </p:style>
+        <p:txBody>
+          <a:bodyPr rtlCol="0" anchor="ctr"/>
+          <a:lstStyle/>
+          <a:p>
+            <a:pPr algn="ctr"/>
+          </a:p>
+        </p:txBody>
+      </p:sp>
+      <p:sp>
+        <p:nvSpPr>
+          <p:cNvPr id="9" name="Right Arrow 8"/>
+          <p:cNvSpPr/>
+          <p:nvPr/>
+        </p:nvSpPr>
+        <p:spPr>
+          <a:xfrm>
+            <a:off x="5879592" y="1828800"/>
+            <a:ext cx="365760" cy="201168"/>
+          </a:xfrm>
+          <a:prstGeom prst="rightArrow">
+            <a:avLst/>
+          </a:prstGeom>
+          <a:solidFill>
+            <a:srgbClr val="6A748C"/>
+          </a:solidFill>
+          <a:ln>
+            <a:noFill/>
+          </a:ln>
+          <a:effectLst/>
+        </p:spPr>
+        <p:style>
+          <a:lnRef idx="1">
+            <a:schemeClr val="accent1"/>
+          </a:lnRef>
+          <a:fillRef idx="3">
+            <a:schemeClr val="accent1"/>
+          </a:fillRef>
+          <a:effectRef idx="2">
+            <a:schemeClr val="accent1"/>
+          </a:effectRef>
+          <a:fontRef idx="minor">
+            <a:schemeClr val="lt1"/>
+          </a:fontRef>
+        </p:style>
+        <p:txBody>
+          <a:bodyPr rtlCol="0" anchor="ctr"/>
+          <a:lstStyle/>
+          <a:p>
+            <a:pPr algn="ctr"/>
+          </a:p>
+        </p:txBody>
+      </p:sp>
+      <p:sp>
+        <p:nvSpPr>
+          <p:cNvPr id="10" name="Right Arrow 9"/>
+          <p:cNvSpPr/>
+          <p:nvPr/>
+        </p:nvSpPr>
+        <p:spPr>
+          <a:xfrm>
+            <a:off x="8851392" y="1828800"/>
+            <a:ext cx="365760" cy="201168"/>
+          </a:xfrm>
+          <a:prstGeom prst="rightArrow">
+            <a:avLst/>
+          </a:prstGeom>
+          <a:solidFill>
+            <a:srgbClr val="6A748C"/>
+          </a:solidFill>
+          <a:ln>
+            <a:noFill/>
+          </a:ln>
+          <a:effectLst/>
+        </p:spPr>
+        <p:style>
+          <a:lnRef idx="1">
+            <a:schemeClr val="accent1"/>
+          </a:lnRef>
+          <a:fillRef idx="3">
+            <a:schemeClr val="accent1"/>
+          </a:fillRef>
+          <a:effectRef idx="2">
+            <a:schemeClr val="accent1"/>
+          </a:effectRef>
+          <a:fontRef idx="minor">
+            <a:schemeClr val="lt1"/>
+          </a:fontRef>
+        </p:style>
+        <p:txBody>
+          <a:bodyPr rtlCol="0" anchor="ctr"/>
+          <a:lstStyle/>
+          <a:p>
+            <a:pPr algn="ctr"/>
+          </a:p>
+        </p:txBody>
+      </p:sp>
+      <p:cxnSp>
+        <p:nvCxnSpPr>
+          <p:cNvPr id="11" name="Connector 10"/>
+          <p:cNvCxnSpPr/>
+          <p:nvPr/>
+        </p:nvCxnSpPr>
+        <p:spPr>
+          <a:xfrm>
+            <a:off x="10469880" y="2514600"/>
+            <a:ext cx="0" cy="411480"/>
+          </a:xfrm>
+          <a:prstGeom prst="line">
+            <a:avLst/>
+          </a:prstGeom>
+          <a:ln w="13970">
+            <a:solidFill>
+              <a:srgbClr val="6A748C"/>
+            </a:solidFill>
+          </a:ln>
+        </p:spPr>
+        <p:style>
+          <a:lnRef idx="2">
+            <a:schemeClr val="accent1"/>
+          </a:lnRef>
+          <a:fillRef idx="0">
+            <a:schemeClr val="accent1"/>
+          </a:fillRef>
+          <a:effectRef idx="1">
+            <a:schemeClr val="accent1"/>
+          </a:effectRef>
+          <a:fontRef idx="minor">
+            <a:schemeClr val="tx1"/>
+          </a:fontRef>
+        </p:style>
+      </p:cxnSp>
+      <p:cxnSp>
+        <p:nvCxnSpPr>
+          <p:cNvPr id="12" name="Connector 11"/>
+          <p:cNvCxnSpPr/>
+          <p:nvPr/>
+        </p:nvCxnSpPr>
+        <p:spPr>
+          <a:xfrm flipH="1">
+            <a:off x="1737360" y="2926080"/>
+            <a:ext cx="8732520" cy="0"/>
+          </a:xfrm>
+          <a:prstGeom prst="line">
+            <a:avLst/>
+          </a:prstGeom>
+          <a:ln w="13970">
+            <a:solidFill>
+              <a:srgbClr val="6A748C"/>
+            </a:solidFill>
+          </a:ln>
+        </p:spPr>
+        <p:style>
+          <a:lnRef idx="2">
+            <a:schemeClr val="accent1"/>
+          </a:lnRef>
+          <a:fillRef idx="0">
+            <a:schemeClr val="accent1"/>
+          </a:fillRef>
+          <a:effectRef idx="1">
+            <a:schemeClr val="accent1"/>
+          </a:effectRef>
+          <a:fontRef idx="minor">
+            <a:schemeClr val="tx1"/>
+          </a:fontRef>
+        </p:style>
+      </p:cxnSp>
+      <p:sp>
+        <p:nvSpPr>
+          <p:cNvPr id="13" name="Down Arrow 12"/>
+          <p:cNvSpPr/>
+          <p:nvPr/>
+        </p:nvSpPr>
+        <p:spPr>
+          <a:xfrm>
+            <a:off x="1627632" y="2926080"/>
+            <a:ext cx="256032" cy="384047"/>
+          </a:xfrm>
+          <a:prstGeom prst="downArrow">
+            <a:avLst/>
+          </a:prstGeom>
+          <a:solidFill>
+            <a:srgbClr val="6A748C"/>
+          </a:solidFill>
+          <a:ln>
+            <a:noFill/>
+          </a:ln>
+          <a:effectLst/>
+        </p:spPr>
+        <p:style>
+          <a:lnRef idx="1">
+            <a:schemeClr val="accent1"/>
+          </a:lnRef>
+          <a:fillRef idx="3">
+            <a:schemeClr val="accent1"/>
+          </a:fillRef>
+          <a:effectRef idx="2">
+            <a:schemeClr val="accent1"/>
+          </a:effectRef>
+          <a:fontRef idx="minor">
+            <a:schemeClr val="lt1"/>
+          </a:fontRef>
+        </p:style>
+        <p:txBody>
+          <a:bodyPr rtlCol="0" anchor="ctr"/>
+          <a:lstStyle/>
+          <a:p>
+            <a:pPr algn="ctr"/>
+          </a:p>
+        </p:txBody>
+      </p:sp>
+      <p:sp>
+        <p:nvSpPr>
+          <p:cNvPr id="14" name="TextBox 13"/>
+          <p:cNvSpPr txBox="1"/>
+          <p:nvPr/>
+        </p:nvSpPr>
+        <p:spPr>
+          <a:xfrm>
+            <a:off x="3200400" y="2743200"/>
+            <a:ext cx="5943600" cy="274320"/>
           </a:xfrm>
           <a:prstGeom prst="rect">
             <a:avLst/>
           </a:prstGeom>
+          <a:noFill/>
         </p:spPr>
-      </p:pic>
+        <p:txBody>
+          <a:bodyPr wrap="square">
+            <a:spAutoFit/>
+          </a:bodyPr>
+          <a:lstStyle/>
+          <a:p>
+            <a:pPr algn="ctr"/>
+            <a:r>
+              <a:rPr sz="900" i="0">
+                <a:solidFill>
+                  <a:srgbClr val="6A748C"/>
+                </a:solidFill>
+                <a:latin typeface="Calibri"/>
+              </a:rPr>
+              <a:t>features reloaded from disk each epoch</a:t>
+            </a:r>
+          </a:p>
+        </p:txBody>
+      </p:sp>
+      <p:sp>
+        <p:nvSpPr>
+          <p:cNvPr id="15" name="Rounded Rectangle 14"/>
+          <p:cNvSpPr/>
+          <p:nvPr/>
+        </p:nvSpPr>
+        <p:spPr>
+          <a:xfrm>
+            <a:off x="548640" y="3566160"/>
+            <a:ext cx="2377440" cy="1188720"/>
+          </a:xfrm>
+          <a:prstGeom prst="roundRect">
+            <a:avLst/>
+          </a:prstGeom>
+          <a:solidFill>
+            <a:srgbClr val="EEF3F7"/>
+          </a:solidFill>
+          <a:ln w="15875">
+            <a:solidFill>
+              <a:srgbClr val="2E5E8C"/>
+            </a:solidFill>
+          </a:ln>
+          <a:effectLst/>
+        </p:spPr>
+        <p:style>
+          <a:lnRef idx="1">
+            <a:schemeClr val="accent1"/>
+          </a:lnRef>
+          <a:fillRef idx="3">
+            <a:schemeClr val="accent1"/>
+          </a:fillRef>
+          <a:effectRef idx="2">
+            <a:schemeClr val="accent1"/>
+          </a:effectRef>
+          <a:fontRef idx="minor">
+            <a:schemeClr val="lt1"/>
+          </a:fontRef>
+        </p:style>
+        <p:txBody>
+          <a:bodyPr rtlCol="0" anchor="ctr" wrap="square" lIns="45720" rIns="45720"/>
+          <a:lstStyle/>
+          <a:p>
+            <a:pPr algn="ctr"/>
+            <a:r>
+              <a:rPr sz="1100">
+                <a:solidFill>
+                  <a:srgbClr val="1B2236"/>
+                </a:solidFill>
+                <a:latin typeface="Calibri"/>
+              </a:rPr>
+              <a:t>LayerNorm + Linear</a:t>
+            </a:r>
+          </a:p>
+          <a:p>
+            <a:pPr algn="ctr"/>
+            <a:r>
+              <a:rPr sz="1100">
+                <a:solidFill>
+                  <a:srgbClr val="1B2236"/>
+                </a:solidFill>
+                <a:latin typeface="Calibri"/>
+              </a:rPr>
+              <a:t>+ positional</a:t>
+            </a:r>
+          </a:p>
+          <a:p>
+            <a:pPr algn="ctr"/>
+            <a:r>
+              <a:rPr sz="1100">
+                <a:solidFill>
+                  <a:srgbClr val="1B2236"/>
+                </a:solidFill>
+                <a:latin typeface="Calibri"/>
+              </a:rPr>
+              <a:t>embedding</a:t>
+            </a:r>
+          </a:p>
+        </p:txBody>
+      </p:sp>
+      <p:sp>
+        <p:nvSpPr>
+          <p:cNvPr id="16" name="Rounded Rectangle 15"/>
+          <p:cNvSpPr/>
+          <p:nvPr/>
+        </p:nvSpPr>
+        <p:spPr>
+          <a:xfrm>
+            <a:off x="3429000" y="3566160"/>
+            <a:ext cx="2377440" cy="1188720"/>
+          </a:xfrm>
+          <a:prstGeom prst="roundRect">
+            <a:avLst/>
+          </a:prstGeom>
+          <a:solidFill>
+            <a:srgbClr val="EEF3F7"/>
+          </a:solidFill>
+          <a:ln w="15875">
+            <a:solidFill>
+              <a:srgbClr val="2E5E8C"/>
+            </a:solidFill>
+          </a:ln>
+          <a:effectLst/>
+        </p:spPr>
+        <p:style>
+          <a:lnRef idx="1">
+            <a:schemeClr val="accent1"/>
+          </a:lnRef>
+          <a:fillRef idx="3">
+            <a:schemeClr val="accent1"/>
+          </a:fillRef>
+          <a:effectRef idx="2">
+            <a:schemeClr val="accent1"/>
+          </a:effectRef>
+          <a:fontRef idx="minor">
+            <a:schemeClr val="lt1"/>
+          </a:fontRef>
+        </p:style>
+        <p:txBody>
+          <a:bodyPr rtlCol="0" anchor="ctr" wrap="square" lIns="45720" rIns="45720"/>
+          <a:lstStyle/>
+          <a:p>
+            <a:pPr algn="ctr"/>
+            <a:r>
+              <a:rPr sz="1100">
+                <a:solidFill>
+                  <a:srgbClr val="1B2236"/>
+                </a:solidFill>
+                <a:latin typeface="Calibri"/>
+              </a:rPr>
+              <a:t>Transformer</a:t>
+            </a:r>
+          </a:p>
+          <a:p>
+            <a:pPr algn="ctr"/>
+            <a:r>
+              <a:rPr sz="1100">
+                <a:solidFill>
+                  <a:srgbClr val="1B2236"/>
+                </a:solidFill>
+                <a:latin typeface="Calibri"/>
+              </a:rPr>
+              <a:t>encoder over</a:t>
+            </a:r>
+          </a:p>
+          <a:p>
+            <a:pPr algn="ctr"/>
+            <a:r>
+              <a:rPr sz="1100">
+                <a:solidFill>
+                  <a:srgbClr val="1B2236"/>
+                </a:solidFill>
+                <a:latin typeface="Calibri"/>
+              </a:rPr>
+              <a:t>the 16 clips</a:t>
+            </a:r>
+          </a:p>
+        </p:txBody>
+      </p:sp>
+      <p:sp>
+        <p:nvSpPr>
+          <p:cNvPr id="17" name="Rounded Rectangle 16"/>
+          <p:cNvSpPr/>
+          <p:nvPr/>
+        </p:nvSpPr>
+        <p:spPr>
+          <a:xfrm>
+            <a:off x="6309360" y="3749039"/>
+            <a:ext cx="2468880" cy="822960"/>
+          </a:xfrm>
+          <a:prstGeom prst="roundRect">
+            <a:avLst/>
+          </a:prstGeom>
+          <a:solidFill>
+            <a:srgbClr val="EEF3F7"/>
+          </a:solidFill>
+          <a:ln w="15875">
+            <a:solidFill>
+              <a:srgbClr val="2E5E8C"/>
+            </a:solidFill>
+          </a:ln>
+          <a:effectLst/>
+        </p:spPr>
+        <p:style>
+          <a:lnRef idx="1">
+            <a:schemeClr val="accent1"/>
+          </a:lnRef>
+          <a:fillRef idx="3">
+            <a:schemeClr val="accent1"/>
+          </a:fillRef>
+          <a:effectRef idx="2">
+            <a:schemeClr val="accent1"/>
+          </a:effectRef>
+          <a:fontRef idx="minor">
+            <a:schemeClr val="lt1"/>
+          </a:fontRef>
+        </p:style>
+        <p:txBody>
+          <a:bodyPr rtlCol="0" anchor="ctr" wrap="square" lIns="45720" rIns="45720"/>
+          <a:lstStyle/>
+          <a:p>
+            <a:pPr algn="ctr"/>
+            <a:r>
+              <a:rPr sz="1100">
+                <a:solidFill>
+                  <a:srgbClr val="1B2236"/>
+                </a:solidFill>
+                <a:latin typeface="Calibri"/>
+              </a:rPr>
+              <a:t>clip logits</a:t>
+            </a:r>
+          </a:p>
+          <a:p>
+            <a:pPr algn="ctr"/>
+            <a:r>
+              <a:rPr sz="1100">
+                <a:solidFill>
+                  <a:srgbClr val="1B2236"/>
+                </a:solidFill>
+                <a:latin typeface="Calibri"/>
+              </a:rPr>
+              <a:t>[16, 14]</a:t>
+            </a:r>
+          </a:p>
+        </p:txBody>
+      </p:sp>
+      <p:sp>
+        <p:nvSpPr>
+          <p:cNvPr id="18" name="Rounded Rectangle 17"/>
+          <p:cNvSpPr/>
+          <p:nvPr/>
+        </p:nvSpPr>
+        <p:spPr>
+          <a:xfrm>
+            <a:off x="9281160" y="3749039"/>
+            <a:ext cx="2377440" cy="822960"/>
+          </a:xfrm>
+          <a:prstGeom prst="roundRect">
+            <a:avLst/>
+          </a:prstGeom>
+          <a:solidFill>
+            <a:srgbClr val="F5EFE6"/>
+          </a:solidFill>
+          <a:ln w="15875">
+            <a:solidFill>
+              <a:srgbClr val="C16B2E"/>
+            </a:solidFill>
+          </a:ln>
+          <a:effectLst/>
+        </p:spPr>
+        <p:style>
+          <a:lnRef idx="1">
+            <a:schemeClr val="accent1"/>
+          </a:lnRef>
+          <a:fillRef idx="3">
+            <a:schemeClr val="accent1"/>
+          </a:fillRef>
+          <a:effectRef idx="2">
+            <a:schemeClr val="accent1"/>
+          </a:effectRef>
+          <a:fontRef idx="minor">
+            <a:schemeClr val="lt1"/>
+          </a:fontRef>
+        </p:style>
+        <p:txBody>
+          <a:bodyPr rtlCol="0" anchor="ctr" wrap="square" lIns="45720" rIns="45720"/>
+          <a:lstStyle/>
+          <a:p>
+            <a:pPr algn="ctr"/>
+            <a:r>
+              <a:rPr sz="1100">
+                <a:solidFill>
+                  <a:srgbClr val="1B2236"/>
+                </a:solidFill>
+                <a:latin typeface="Calibri"/>
+              </a:rPr>
+              <a:t>top-k MIL pooling</a:t>
+            </a:r>
+          </a:p>
+          <a:p>
+            <a:pPr algn="ctr"/>
+            <a:r>
+              <a:rPr sz="1100">
+                <a:solidFill>
+                  <a:srgbClr val="1B2236"/>
+                </a:solidFill>
+                <a:latin typeface="Calibri"/>
+              </a:rPr>
+              <a:t>-&gt; video logits</a:t>
+            </a:r>
+          </a:p>
+        </p:txBody>
+      </p:sp>
+      <p:sp>
+        <p:nvSpPr>
+          <p:cNvPr id="19" name="Right Arrow 18"/>
+          <p:cNvSpPr/>
+          <p:nvPr/>
+        </p:nvSpPr>
+        <p:spPr>
+          <a:xfrm>
+            <a:off x="2999232" y="4114800"/>
+            <a:ext cx="365759" cy="201168"/>
+          </a:xfrm>
+          <a:prstGeom prst="rightArrow">
+            <a:avLst/>
+          </a:prstGeom>
+          <a:solidFill>
+            <a:srgbClr val="6A748C"/>
+          </a:solidFill>
+          <a:ln>
+            <a:noFill/>
+          </a:ln>
+          <a:effectLst/>
+        </p:spPr>
+        <p:style>
+          <a:lnRef idx="1">
+            <a:schemeClr val="accent1"/>
+          </a:lnRef>
+          <a:fillRef idx="3">
+            <a:schemeClr val="accent1"/>
+          </a:fillRef>
+          <a:effectRef idx="2">
+            <a:schemeClr val="accent1"/>
+          </a:effectRef>
+          <a:fontRef idx="minor">
+            <a:schemeClr val="lt1"/>
+          </a:fontRef>
+        </p:style>
+        <p:txBody>
+          <a:bodyPr rtlCol="0" anchor="ctr"/>
+          <a:lstStyle/>
+          <a:p>
+            <a:pPr algn="ctr"/>
+          </a:p>
+        </p:txBody>
+      </p:sp>
+      <p:sp>
+        <p:nvSpPr>
+          <p:cNvPr id="20" name="Right Arrow 19"/>
+          <p:cNvSpPr/>
+          <p:nvPr/>
+        </p:nvSpPr>
+        <p:spPr>
+          <a:xfrm>
+            <a:off x="5879592" y="4114800"/>
+            <a:ext cx="365760" cy="201168"/>
+          </a:xfrm>
+          <a:prstGeom prst="rightArrow">
+            <a:avLst/>
+          </a:prstGeom>
+          <a:solidFill>
+            <a:srgbClr val="6A748C"/>
+          </a:solidFill>
+          <a:ln>
+            <a:noFill/>
+          </a:ln>
+          <a:effectLst/>
+        </p:spPr>
+        <p:style>
+          <a:lnRef idx="1">
+            <a:schemeClr val="accent1"/>
+          </a:lnRef>
+          <a:fillRef idx="3">
+            <a:schemeClr val="accent1"/>
+          </a:fillRef>
+          <a:effectRef idx="2">
+            <a:schemeClr val="accent1"/>
+          </a:effectRef>
+          <a:fontRef idx="minor">
+            <a:schemeClr val="lt1"/>
+          </a:fontRef>
+        </p:style>
+        <p:txBody>
+          <a:bodyPr rtlCol="0" anchor="ctr"/>
+          <a:lstStyle/>
+          <a:p>
+            <a:pPr algn="ctr"/>
+          </a:p>
+        </p:txBody>
+      </p:sp>
+      <p:sp>
+        <p:nvSpPr>
+          <p:cNvPr id="21" name="Right Arrow 20"/>
+          <p:cNvSpPr/>
+          <p:nvPr/>
+        </p:nvSpPr>
+        <p:spPr>
+          <a:xfrm>
+            <a:off x="8851392" y="4114800"/>
+            <a:ext cx="365760" cy="201168"/>
+          </a:xfrm>
+          <a:prstGeom prst="rightArrow">
+            <a:avLst/>
+          </a:prstGeom>
+          <a:solidFill>
+            <a:srgbClr val="6A748C"/>
+          </a:solidFill>
+          <a:ln>
+            <a:noFill/>
+          </a:ln>
+          <a:effectLst/>
+        </p:spPr>
+        <p:style>
+          <a:lnRef idx="1">
+            <a:schemeClr val="accent1"/>
+          </a:lnRef>
+          <a:fillRef idx="3">
+            <a:schemeClr val="accent1"/>
+          </a:fillRef>
+          <a:effectRef idx="2">
+            <a:schemeClr val="accent1"/>
+          </a:effectRef>
+          <a:fontRef idx="minor">
+            <a:schemeClr val="lt1"/>
+          </a:fontRef>
+        </p:style>
+        <p:txBody>
+          <a:bodyPr rtlCol="0" anchor="ctr"/>
+          <a:lstStyle/>
+          <a:p>
+            <a:pPr algn="ctr"/>
+          </a:p>
+        </p:txBody>
+      </p:sp>
+      <p:sp>
+        <p:nvSpPr>
+          <p:cNvPr id="22" name="TextBox 21"/>
+          <p:cNvSpPr txBox="1"/>
+          <p:nvPr/>
+        </p:nvSpPr>
+        <p:spPr>
+          <a:xfrm>
+            <a:off x="548640" y="4983480"/>
+            <a:ext cx="11064240" cy="274320"/>
+          </a:xfrm>
+          <a:prstGeom prst="rect">
+            <a:avLst/>
+          </a:prstGeom>
+          <a:noFill/>
+        </p:spPr>
+        <p:txBody>
+          <a:bodyPr wrap="square">
+            <a:spAutoFit/>
+          </a:bodyPr>
+          <a:lstStyle/>
+          <a:p>
+            <a:pPr algn="ctr"/>
+            <a:r>
+              <a:rPr sz="1000" i="1">
+                <a:solidFill>
+                  <a:srgbClr val="6A748C"/>
+                </a:solidFill>
+                <a:latin typeface="Calibri"/>
+              </a:rPr>
+              <a:t>Stage 2  -  trains in ~80 s, so hyper-parameters can be swept</a:t>
+            </a:r>
+          </a:p>
+        </p:txBody>
+      </p:sp>
     </p:spTree>
   </p:cSld>
   <p:clrMapOvr>
@@ -3221,7 +5652,7 @@
         </p:nvSpPr>
         <p:spPr>
           <a:xfrm>
-            <a:off x="457200" y="274320"/>
+            <a:off x="457200" y="228600"/>
             <a:ext cx="11247120" cy="457200"/>
           </a:xfrm>
           <a:prstGeom prst="rect">
@@ -3230,7 +5661,7 @@
           <a:noFill/>
         </p:spPr>
         <p:txBody>
-          <a:bodyPr wrap="square">
+          <a:bodyPr wrap="none">
             <a:spAutoFit/>
           </a:bodyPr>
           <a:lstStyle/>
@@ -3250,14 +5681,347 @@
       </p:sp>
       <p:sp>
         <p:nvSpPr>
-          <p:cNvPr id="3" name="TextBox 2"/>
+          <p:cNvPr id="3" name="Rounded Rectangle 2"/>
+          <p:cNvSpPr/>
+          <p:nvPr/>
+        </p:nvSpPr>
+        <p:spPr>
+          <a:xfrm>
+            <a:off x="548640" y="1188720"/>
+            <a:ext cx="3017520" cy="1234440"/>
+          </a:xfrm>
+          <a:prstGeom prst="roundRect">
+            <a:avLst/>
+          </a:prstGeom>
+          <a:solidFill>
+            <a:srgbClr val="EEF3F7"/>
+          </a:solidFill>
+          <a:ln w="15875">
+            <a:solidFill>
+              <a:srgbClr val="2E5E8C"/>
+            </a:solidFill>
+          </a:ln>
+          <a:effectLst/>
+        </p:spPr>
+        <p:style>
+          <a:lnRef idx="1">
+            <a:schemeClr val="accent1"/>
+          </a:lnRef>
+          <a:fillRef idx="3">
+            <a:schemeClr val="accent1"/>
+          </a:fillRef>
+          <a:effectRef idx="2">
+            <a:schemeClr val="accent1"/>
+          </a:effectRef>
+          <a:fontRef idx="minor">
+            <a:schemeClr val="lt1"/>
+          </a:fontRef>
+        </p:style>
+        <p:txBody>
+          <a:bodyPr rtlCol="0" anchor="ctr" wrap="square" lIns="45720" rIns="45720"/>
+          <a:lstStyle/>
+          <a:p>
+            <a:pPr algn="ctr"/>
+            <a:r>
+              <a:rPr sz="1100">
+                <a:solidFill>
+                  <a:srgbClr val="1B2236"/>
+                </a:solidFill>
+                <a:latin typeface="Calibri"/>
+              </a:rPr>
+              <a:t>per-clip softmax</a:t>
+            </a:r>
+          </a:p>
+          <a:p>
+            <a:pPr algn="ctr"/>
+            <a:r>
+              <a:rPr sz="1100">
+                <a:solidFill>
+                  <a:srgbClr val="1B2236"/>
+                </a:solidFill>
+                <a:latin typeface="Calibri"/>
+              </a:rPr>
+              <a:t>P(c | clip), c = 0..13</a:t>
+            </a:r>
+          </a:p>
+        </p:txBody>
+      </p:sp>
+      <p:sp>
+        <p:nvSpPr>
+          <p:cNvPr id="4" name="Rounded Rectangle 3"/>
+          <p:cNvSpPr/>
+          <p:nvPr/>
+        </p:nvSpPr>
+        <p:spPr>
+          <a:xfrm>
+            <a:off x="4206240" y="1188720"/>
+            <a:ext cx="3200400" cy="1234440"/>
+          </a:xfrm>
+          <a:prstGeom prst="roundRect">
+            <a:avLst/>
+          </a:prstGeom>
+          <a:solidFill>
+            <a:srgbClr val="F5EFE6"/>
+          </a:solidFill>
+          <a:ln w="15875">
+            <a:solidFill>
+              <a:srgbClr val="C16B2E"/>
+            </a:solidFill>
+          </a:ln>
+          <a:effectLst/>
+        </p:spPr>
+        <p:style>
+          <a:lnRef idx="1">
+            <a:schemeClr val="accent1"/>
+          </a:lnRef>
+          <a:fillRef idx="3">
+            <a:schemeClr val="accent1"/>
+          </a:fillRef>
+          <a:effectRef idx="2">
+            <a:schemeClr val="accent1"/>
+          </a:effectRef>
+          <a:fontRef idx="minor">
+            <a:schemeClr val="lt1"/>
+          </a:fontRef>
+        </p:style>
+        <p:txBody>
+          <a:bodyPr rtlCol="0" anchor="ctr" wrap="square" lIns="45720" rIns="45720"/>
+          <a:lstStyle/>
+          <a:p>
+            <a:pPr algn="ctr"/>
+            <a:r>
+              <a:rPr sz="1100">
+                <a:solidFill>
+                  <a:srgbClr val="1B2236"/>
+                </a:solidFill>
+                <a:latin typeface="Calibri"/>
+              </a:rPr>
+              <a:t>anomaly evidence</a:t>
+            </a:r>
+          </a:p>
+          <a:p>
+            <a:pPr algn="ctr"/>
+            <a:r>
+              <a:rPr sz="1100">
+                <a:solidFill>
+                  <a:srgbClr val="1B2236"/>
+                </a:solidFill>
+                <a:latin typeface="Calibri"/>
+              </a:rPr>
+              <a:t>s = max over clips</a:t>
+            </a:r>
+          </a:p>
+          <a:p>
+            <a:pPr algn="ctr"/>
+            <a:r>
+              <a:rPr sz="1100">
+                <a:solidFill>
+                  <a:srgbClr val="1B2236"/>
+                </a:solidFill>
+                <a:latin typeface="Calibri"/>
+              </a:rPr>
+              <a:t>of 1 - P(Normal)</a:t>
+            </a:r>
+          </a:p>
+        </p:txBody>
+      </p:sp>
+      <p:sp>
+        <p:nvSpPr>
+          <p:cNvPr id="5" name="Rounded Rectangle 4"/>
+          <p:cNvSpPr/>
+          <p:nvPr/>
+        </p:nvSpPr>
+        <p:spPr>
+          <a:xfrm>
+            <a:off x="8046720" y="1188720"/>
+            <a:ext cx="3108960" cy="1234440"/>
+          </a:xfrm>
+          <a:prstGeom prst="roundRect">
+            <a:avLst/>
+          </a:prstGeom>
+          <a:solidFill>
+            <a:srgbClr val="EEF3F7"/>
+          </a:solidFill>
+          <a:ln w="15875">
+            <a:solidFill>
+              <a:srgbClr val="2E5E8C"/>
+            </a:solidFill>
+          </a:ln>
+          <a:effectLst/>
+        </p:spPr>
+        <p:style>
+          <a:lnRef idx="1">
+            <a:schemeClr val="accent1"/>
+          </a:lnRef>
+          <a:fillRef idx="3">
+            <a:schemeClr val="accent1"/>
+          </a:fillRef>
+          <a:effectRef idx="2">
+            <a:schemeClr val="accent1"/>
+          </a:effectRef>
+          <a:fontRef idx="minor">
+            <a:schemeClr val="lt1"/>
+          </a:fontRef>
+        </p:style>
+        <p:txBody>
+          <a:bodyPr rtlCol="0" anchor="ctr" wrap="square" lIns="45720" rIns="45720"/>
+          <a:lstStyle/>
+          <a:p>
+            <a:pPr algn="ctr"/>
+            <a:r>
+              <a:rPr sz="1100">
+                <a:solidFill>
+                  <a:srgbClr val="1B2236"/>
+                </a:solidFill>
+                <a:latin typeface="Calibri"/>
+              </a:rPr>
+              <a:t>s &lt; threshold ?</a:t>
+            </a:r>
+          </a:p>
+        </p:txBody>
+      </p:sp>
+      <p:sp>
+        <p:nvSpPr>
+          <p:cNvPr id="6" name="Right Arrow 5"/>
+          <p:cNvSpPr/>
+          <p:nvPr/>
+        </p:nvSpPr>
+        <p:spPr>
+          <a:xfrm>
+            <a:off x="3657600" y="1709928"/>
+            <a:ext cx="457200" cy="201168"/>
+          </a:xfrm>
+          <a:prstGeom prst="rightArrow">
+            <a:avLst/>
+          </a:prstGeom>
+          <a:solidFill>
+            <a:srgbClr val="6A748C"/>
+          </a:solidFill>
+          <a:ln>
+            <a:noFill/>
+          </a:ln>
+          <a:effectLst/>
+        </p:spPr>
+        <p:style>
+          <a:lnRef idx="1">
+            <a:schemeClr val="accent1"/>
+          </a:lnRef>
+          <a:fillRef idx="3">
+            <a:schemeClr val="accent1"/>
+          </a:fillRef>
+          <a:effectRef idx="2">
+            <a:schemeClr val="accent1"/>
+          </a:effectRef>
+          <a:fontRef idx="minor">
+            <a:schemeClr val="lt1"/>
+          </a:fontRef>
+        </p:style>
+        <p:txBody>
+          <a:bodyPr rtlCol="0" anchor="ctr"/>
+          <a:lstStyle/>
+          <a:p>
+            <a:pPr algn="ctr"/>
+          </a:p>
+        </p:txBody>
+      </p:sp>
+      <p:sp>
+        <p:nvSpPr>
+          <p:cNvPr id="7" name="Right Arrow 6"/>
+          <p:cNvSpPr/>
+          <p:nvPr/>
+        </p:nvSpPr>
+        <p:spPr>
+          <a:xfrm>
+            <a:off x="7498079" y="1709928"/>
+            <a:ext cx="457200" cy="201168"/>
+          </a:xfrm>
+          <a:prstGeom prst="rightArrow">
+            <a:avLst/>
+          </a:prstGeom>
+          <a:solidFill>
+            <a:srgbClr val="6A748C"/>
+          </a:solidFill>
+          <a:ln>
+            <a:noFill/>
+          </a:ln>
+          <a:effectLst/>
+        </p:spPr>
+        <p:style>
+          <a:lnRef idx="1">
+            <a:schemeClr val="accent1"/>
+          </a:lnRef>
+          <a:fillRef idx="3">
+            <a:schemeClr val="accent1"/>
+          </a:fillRef>
+          <a:effectRef idx="2">
+            <a:schemeClr val="accent1"/>
+          </a:effectRef>
+          <a:fontRef idx="minor">
+            <a:schemeClr val="lt1"/>
+          </a:fontRef>
+        </p:style>
+        <p:txBody>
+          <a:bodyPr rtlCol="0" anchor="ctr"/>
+          <a:lstStyle/>
+          <a:p>
+            <a:pPr algn="ctr"/>
+          </a:p>
+        </p:txBody>
+      </p:sp>
+      <p:sp>
+        <p:nvSpPr>
+          <p:cNvPr id="8" name="Down Arrow 7"/>
+          <p:cNvSpPr/>
+          <p:nvPr/>
+        </p:nvSpPr>
+        <p:spPr>
+          <a:xfrm>
+            <a:off x="9509760" y="2514600"/>
+            <a:ext cx="256032" cy="1051560"/>
+          </a:xfrm>
+          <a:prstGeom prst="downArrow">
+            <a:avLst/>
+          </a:prstGeom>
+          <a:solidFill>
+            <a:srgbClr val="6A748C"/>
+          </a:solidFill>
+          <a:ln>
+            <a:noFill/>
+          </a:ln>
+          <a:effectLst/>
+        </p:spPr>
+        <p:style>
+          <a:lnRef idx="1">
+            <a:schemeClr val="accent1"/>
+          </a:lnRef>
+          <a:fillRef idx="3">
+            <a:schemeClr val="accent1"/>
+          </a:fillRef>
+          <a:effectRef idx="2">
+            <a:schemeClr val="accent1"/>
+          </a:effectRef>
+          <a:fontRef idx="minor">
+            <a:schemeClr val="lt1"/>
+          </a:fontRef>
+        </p:style>
+        <p:txBody>
+          <a:bodyPr rtlCol="0" anchor="ctr"/>
+          <a:lstStyle/>
+          <a:p>
+            <a:pPr algn="ctr"/>
+          </a:p>
+        </p:txBody>
+      </p:sp>
+      <p:sp>
+        <p:nvSpPr>
+          <p:cNvPr id="9" name="TextBox 8"/>
           <p:cNvSpPr txBox="1"/>
           <p:nvPr/>
         </p:nvSpPr>
         <p:spPr>
           <a:xfrm>
-            <a:off x="457200" y="6309360"/>
-            <a:ext cx="11247120" cy="365760"/>
+            <a:off x="9646920" y="2834640"/>
+            <a:ext cx="914400" cy="274320"/>
           </a:xfrm>
           <a:prstGeom prst="rect">
             <a:avLst/>
@@ -3270,49 +6034,246 @@
           </a:bodyPr>
           <a:lstStyle/>
           <a:p>
-            <a:pPr rtl="1" algn="r"/>
-            <a:r>
-              <a:rPr sz="1100" b="0">
+            <a:pPr algn="l"/>
+            <a:r>
+              <a:rPr sz="1100" i="0">
                 <a:solidFill>
                   <a:srgbClr val="6A748C"/>
                 </a:solidFill>
-                <a:latin typeface="B Nazanin"/>
+                <a:latin typeface="Calibri"/>
               </a:rPr>
-              <a:t>برای ویرایش: راست‌کلیک روی شکل ← Convert to Shape   |   فایل برداری: figures/fig_two_stage.svg</a:t>
-            </a:r>
-          </a:p>
-        </p:txBody>
-      </p:sp>
-      <p:pic>
-        <p:nvPicPr>
-          <p:cNvPr id="4" name="Picture 3" descr="fig_two_stage.png"/>
-          <p:cNvPicPr>
-            <a:picLocks noChangeAspect="1"/>
-          </p:cNvPicPr>
+              <a:t>yes</a:t>
+            </a:r>
+          </a:p>
+        </p:txBody>
+      </p:sp>
+      <p:sp>
+        <p:nvSpPr>
+          <p:cNvPr id="10" name="Rounded Rectangle 9"/>
+          <p:cNvSpPr/>
           <p:nvPr/>
-        </p:nvPicPr>
-        <p:blipFill>
-          <a:blip r:embed="rId2">
-            <a:extLst>
-              <a:ext uri="{96DAC541-7B7A-43D3-8B79-37D633B846F1}">
-                <ns2:svgBlip xmlns:ns2="http://schemas.microsoft.com/office/drawing/2016/SVG/main" r:embed="rId3"/>
-              </a:ext>
-            </a:extLst>
-          </a:blip>
-          <a:stretch>
-            <a:fillRect/>
-          </a:stretch>
-        </p:blipFill>
+        </p:nvSpPr>
         <p:spPr>
           <a:xfrm>
-            <a:off x="1046849" y="914400"/>
-            <a:ext cx="10097997" cy="5212079"/>
+            <a:off x="8046720" y="3703320"/>
+            <a:ext cx="3108960" cy="914400"/>
+          </a:xfrm>
+          <a:prstGeom prst="roundRect">
+            <a:avLst/>
+          </a:prstGeom>
+          <a:solidFill>
+            <a:srgbClr val="EAF1E8"/>
+          </a:solidFill>
+          <a:ln w="15875">
+            <a:solidFill>
+              <a:srgbClr val="5B7D55"/>
+            </a:solidFill>
+          </a:ln>
+          <a:effectLst/>
+        </p:spPr>
+        <p:style>
+          <a:lnRef idx="1">
+            <a:schemeClr val="accent1"/>
+          </a:lnRef>
+          <a:fillRef idx="3">
+            <a:schemeClr val="accent1"/>
+          </a:fillRef>
+          <a:effectRef idx="2">
+            <a:schemeClr val="accent1"/>
+          </a:effectRef>
+          <a:fontRef idx="minor">
+            <a:schemeClr val="lt1"/>
+          </a:fontRef>
+        </p:style>
+        <p:txBody>
+          <a:bodyPr rtlCol="0" anchor="ctr" wrap="square" lIns="45720" rIns="45720"/>
+          <a:lstStyle/>
+          <a:p>
+            <a:pPr algn="ctr"/>
+            <a:r>
+              <a:rPr sz="1100">
+                <a:solidFill>
+                  <a:srgbClr val="1B2236"/>
+                </a:solidFill>
+                <a:latin typeface="Calibri"/>
+              </a:rPr>
+              <a:t>predict Normal</a:t>
+            </a:r>
+          </a:p>
+        </p:txBody>
+      </p:sp>
+      <p:cxnSp>
+        <p:nvCxnSpPr>
+          <p:cNvPr id="11" name="Connector 10"/>
+          <p:cNvCxnSpPr/>
+          <p:nvPr/>
+        </p:nvCxnSpPr>
+        <p:spPr>
+          <a:xfrm flipH="1">
+            <a:off x="4754880" y="2514600"/>
+            <a:ext cx="3749040" cy="1051560"/>
+          </a:xfrm>
+          <a:prstGeom prst="line">
+            <a:avLst/>
+          </a:prstGeom>
+          <a:ln w="13970">
+            <a:solidFill>
+              <a:srgbClr val="6A748C"/>
+            </a:solidFill>
+          </a:ln>
+        </p:spPr>
+        <p:style>
+          <a:lnRef idx="2">
+            <a:schemeClr val="accent1"/>
+          </a:lnRef>
+          <a:fillRef idx="0">
+            <a:schemeClr val="accent1"/>
+          </a:fillRef>
+          <a:effectRef idx="1">
+            <a:schemeClr val="accent1"/>
+          </a:effectRef>
+          <a:fontRef idx="minor">
+            <a:schemeClr val="tx1"/>
+          </a:fontRef>
+        </p:style>
+      </p:cxnSp>
+      <p:sp>
+        <p:nvSpPr>
+          <p:cNvPr id="12" name="TextBox 11"/>
+          <p:cNvSpPr txBox="1"/>
+          <p:nvPr/>
+        </p:nvSpPr>
+        <p:spPr>
+          <a:xfrm>
+            <a:off x="6035040" y="2788920"/>
+            <a:ext cx="1097280" cy="274320"/>
           </a:xfrm>
           <a:prstGeom prst="rect">
             <a:avLst/>
           </a:prstGeom>
+          <a:noFill/>
         </p:spPr>
-      </p:pic>
+        <p:txBody>
+          <a:bodyPr wrap="square">
+            <a:spAutoFit/>
+          </a:bodyPr>
+          <a:lstStyle/>
+          <a:p>
+            <a:pPr algn="ctr"/>
+            <a:r>
+              <a:rPr sz="1100" i="0">
+                <a:solidFill>
+                  <a:srgbClr val="6A748C"/>
+                </a:solidFill>
+                <a:latin typeface="Calibri"/>
+              </a:rPr>
+              <a:t>no</a:t>
+            </a:r>
+          </a:p>
+        </p:txBody>
+      </p:sp>
+      <p:sp>
+        <p:nvSpPr>
+          <p:cNvPr id="13" name="Rounded Rectangle 12"/>
+          <p:cNvSpPr/>
+          <p:nvPr/>
+        </p:nvSpPr>
+        <p:spPr>
+          <a:xfrm>
+            <a:off x="822960" y="3703320"/>
+            <a:ext cx="6217920" cy="914400"/>
+          </a:xfrm>
+          <a:prstGeom prst="roundRect">
+            <a:avLst/>
+          </a:prstGeom>
+          <a:solidFill>
+            <a:srgbClr val="F5EFE6"/>
+          </a:solidFill>
+          <a:ln w="15875">
+            <a:solidFill>
+              <a:srgbClr val="C16B2E"/>
+            </a:solidFill>
+          </a:ln>
+          <a:effectLst/>
+        </p:spPr>
+        <p:style>
+          <a:lnRef idx="1">
+            <a:schemeClr val="accent1"/>
+          </a:lnRef>
+          <a:fillRef idx="3">
+            <a:schemeClr val="accent1"/>
+          </a:fillRef>
+          <a:effectRef idx="2">
+            <a:schemeClr val="accent1"/>
+          </a:effectRef>
+          <a:fontRef idx="minor">
+            <a:schemeClr val="lt1"/>
+          </a:fontRef>
+        </p:style>
+        <p:txBody>
+          <a:bodyPr rtlCol="0" anchor="ctr" wrap="square" lIns="45720" rIns="45720"/>
+          <a:lstStyle/>
+          <a:p>
+            <a:pPr algn="ctr"/>
+            <a:r>
+              <a:rPr sz="1100">
+                <a:solidFill>
+                  <a:srgbClr val="1B2236"/>
+                </a:solidFill>
+                <a:latin typeface="Calibri"/>
+              </a:rPr>
+              <a:t>average P over the top-k most anomalous clips,</a:t>
+            </a:r>
+          </a:p>
+          <a:p>
+            <a:pPr algn="ctr"/>
+            <a:r>
+              <a:rPr sz="1100">
+                <a:solidFill>
+                  <a:srgbClr val="1B2236"/>
+                </a:solidFill>
+                <a:latin typeface="Calibri"/>
+              </a:rPr>
+              <a:t>argmax over classes 1..13</a:t>
+            </a:r>
+          </a:p>
+        </p:txBody>
+      </p:sp>
+      <p:sp>
+        <p:nvSpPr>
+          <p:cNvPr id="14" name="TextBox 13"/>
+          <p:cNvSpPr txBox="1"/>
+          <p:nvPr/>
+        </p:nvSpPr>
+        <p:spPr>
+          <a:xfrm>
+            <a:off x="548640" y="5029200"/>
+            <a:ext cx="11064240" cy="274320"/>
+          </a:xfrm>
+          <a:prstGeom prst="rect">
+            <a:avLst/>
+          </a:prstGeom>
+          <a:noFill/>
+        </p:spPr>
+        <p:txBody>
+          <a:bodyPr wrap="square">
+            <a:spAutoFit/>
+          </a:bodyPr>
+          <a:lstStyle/>
+          <a:p>
+            <a:pPr algn="ctr"/>
+            <a:r>
+              <a:rPr sz="1000" i="1">
+                <a:solidFill>
+                  <a:srgbClr val="6A748C"/>
+                </a:solidFill>
+                <a:latin typeface="Calibri"/>
+              </a:rPr>
+              <a:t>Stage 1 answers "is it anomalous", stage 2 answers "which anomaly"</a:t>
+            </a:r>
+          </a:p>
+        </p:txBody>
+      </p:sp>
     </p:spTree>
   </p:cSld>
   <p:clrMapOvr>
@@ -3339,7 +6300,7 @@
         </p:nvSpPr>
         <p:spPr>
           <a:xfrm>
-            <a:off x="457200" y="274320"/>
+            <a:off x="457200" y="228600"/>
             <a:ext cx="11247120" cy="457200"/>
           </a:xfrm>
           <a:prstGeom prst="rect">
@@ -3348,7 +6309,7 @@
           <a:noFill/>
         </p:spPr>
         <p:txBody>
-          <a:bodyPr wrap="square">
+          <a:bodyPr wrap="none">
             <a:spAutoFit/>
           </a:bodyPr>
           <a:lstStyle/>
@@ -3366,16 +6327,34 @@
           </a:p>
         </p:txBody>
       </p:sp>
-      <p:sp>
-        <p:nvSpPr>
-          <p:cNvPr id="3" name="TextBox 2"/>
+      <p:graphicFrame>
+        <p:nvGraphicFramePr>
+          <p:cNvPr id="3" name="Chart 2"/>
+          <p:cNvGraphicFramePr>
+            <a:graphicFrameLocks noGrp="1"/>
+          </p:cNvGraphicFramePr>
+          <p:nvPr/>
+        </p:nvGraphicFramePr>
+        <p:xfrm>
+          <a:off x="822960" y="1097280"/>
+          <a:ext cx="10515600" cy="4480560"/>
+        </p:xfrm>
+        <a:graphic>
+          <a:graphicData uri="http://schemas.openxmlformats.org/drawingml/2006/chart">
+            <c:chart xmlns:c="http://schemas.openxmlformats.org/drawingml/2006/chart" r:id="rId2"/>
+          </a:graphicData>
+        </a:graphic>
+      </p:graphicFrame>
+      <p:sp>
+        <p:nvSpPr>
+          <p:cNvPr id="4" name="TextBox 3"/>
           <p:cNvSpPr txBox="1"/>
           <p:nvPr/>
         </p:nvSpPr>
         <p:spPr>
           <a:xfrm>
-            <a:off x="457200" y="6309360"/>
-            <a:ext cx="11247120" cy="365760"/>
+            <a:off x="822960" y="5715000"/>
+            <a:ext cx="10515600" cy="274320"/>
           </a:xfrm>
           <a:prstGeom prst="rect">
             <a:avLst/>
@@ -3388,49 +6367,19 @@
           </a:bodyPr>
           <a:lstStyle/>
           <a:p>
-            <a:pPr rtl="1" algn="r"/>
-            <a:r>
-              <a:rPr sz="1100" b="0">
-                <a:solidFill>
-                  <a:srgbClr val="6A748C"/>
-                </a:solidFill>
-                <a:latin typeface="B Nazanin"/>
+            <a:pPr algn="ctr"/>
+            <a:r>
+              <a:rPr sz="1000" i="1">
+                <a:solidFill>
+                  <a:srgbClr val="C16B2E"/>
+                </a:solidFill>
+                <a:latin typeface="Calibri"/>
               </a:rPr>
-              <a:t>برای ویرایش: راست‌کلیک روی شکل ← Convert to Shape   |   فایل برداری: figures/fig_macro_f1_progress.svg</a:t>
-            </a:r>
-          </a:p>
-        </p:txBody>
-      </p:sp>
-      <p:pic>
-        <p:nvPicPr>
-          <p:cNvPr id="4" name="Picture 3" descr="fig_macro_f1_progress.png"/>
-          <p:cNvPicPr>
-            <a:picLocks noChangeAspect="1"/>
-          </p:cNvPicPr>
-          <p:nvPr/>
-        </p:nvPicPr>
-        <p:blipFill>
-          <a:blip r:embed="rId2">
-            <a:extLst>
-              <a:ext uri="{96DAC541-7B7A-43D3-8B79-37D633B846F1}">
-                <ns2:svgBlip xmlns:ns2="http://schemas.microsoft.com/office/drawing/2016/SVG/main" r:embed="rId3"/>
-              </a:ext>
-            </a:extLst>
-          </a:blip>
-          <a:stretch>
-            <a:fillRect/>
-          </a:stretch>
-        </p:blipFill>
-        <p:spPr>
-          <a:xfrm>
-            <a:off x="1305698" y="914400"/>
-            <a:ext cx="9580299" cy="5212079"/>
-          </a:xfrm>
-          <a:prstGeom prst="rect">
-            <a:avLst/>
-          </a:prstGeom>
-        </p:spPr>
-      </p:pic>
+              <a:t>X-CLIP fine-tuned reached 0.3881 on its own split</a:t>
+            </a:r>
+          </a:p>
+        </p:txBody>
+      </p:sp>
     </p:spTree>
   </p:cSld>
   <p:clrMapOvr>
@@ -3457,7 +6406,7 @@
         </p:nvSpPr>
         <p:spPr>
           <a:xfrm>
-            <a:off x="457200" y="274320"/>
+            <a:off x="457200" y="228600"/>
             <a:ext cx="11247120" cy="457200"/>
           </a:xfrm>
           <a:prstGeom prst="rect">
@@ -3466,7 +6415,7 @@
           <a:noFill/>
         </p:spPr>
         <p:txBody>
-          <a:bodyPr wrap="square">
+          <a:bodyPr wrap="none">
             <a:spAutoFit/>
           </a:bodyPr>
           <a:lstStyle/>
@@ -3479,76 +6428,29 @@
                 </a:solidFill>
                 <a:latin typeface="B Nazanin"/>
               </a:rPr>
-              <a:t>شکل ۳-۲  مقایسه‌ی دو رمزگذار در پنج بذر مستقل</a:t>
-            </a:r>
-          </a:p>
-        </p:txBody>
-      </p:sp>
-      <p:sp>
-        <p:nvSpPr>
-          <p:cNvPr id="3" name="TextBox 2"/>
-          <p:cNvSpPr txBox="1"/>
+              <a:t>شکل ۳-۲  مقایسه‌ی دو رمزگذار</a:t>
+            </a:r>
+          </a:p>
+        </p:txBody>
+      </p:sp>
+      <p:graphicFrame>
+        <p:nvGraphicFramePr>
+          <p:cNvPr id="3" name="Chart 2"/>
+          <p:cNvGraphicFramePr>
+            <a:graphicFrameLocks noGrp="1"/>
+          </p:cNvGraphicFramePr>
           <p:nvPr/>
-        </p:nvSpPr>
-        <p:spPr>
-          <a:xfrm>
-            <a:off x="457200" y="6309360"/>
-            <a:ext cx="11247120" cy="365760"/>
-          </a:xfrm>
-          <a:prstGeom prst="rect">
-            <a:avLst/>
-          </a:prstGeom>
-          <a:noFill/>
-        </p:spPr>
-        <p:txBody>
-          <a:bodyPr wrap="square">
-            <a:spAutoFit/>
-          </a:bodyPr>
-          <a:lstStyle/>
-          <a:p>
-            <a:pPr rtl="1" algn="r"/>
-            <a:r>
-              <a:rPr sz="1100" b="0">
-                <a:solidFill>
-                  <a:srgbClr val="6A748C"/>
-                </a:solidFill>
-                <a:latin typeface="B Nazanin"/>
-              </a:rPr>
-              <a:t>برای ویرایش: راست‌کلیک روی شکل ← Convert to Shape   |   فایل برداری: figures/fig_backbone_compare.svg</a:t>
-            </a:r>
-          </a:p>
-        </p:txBody>
-      </p:sp>
-      <p:pic>
-        <p:nvPicPr>
-          <p:cNvPr id="4" name="Picture 3" descr="fig_backbone_compare.png"/>
-          <p:cNvPicPr>
-            <a:picLocks noChangeAspect="1"/>
-          </p:cNvPicPr>
-          <p:nvPr/>
-        </p:nvPicPr>
-        <p:blipFill>
-          <a:blip r:embed="rId2">
-            <a:extLst>
-              <a:ext uri="{96DAC541-7B7A-43D3-8B79-37D633B846F1}">
-                <ns2:svgBlip xmlns:ns2="http://schemas.microsoft.com/office/drawing/2016/SVG/main" r:embed="rId3"/>
-              </a:ext>
-            </a:extLst>
-          </a:blip>
-          <a:stretch>
-            <a:fillRect/>
-          </a:stretch>
-        </p:blipFill>
-        <p:spPr>
-          <a:xfrm>
-            <a:off x="1003956" y="914400"/>
-            <a:ext cx="10183782" cy="5212079"/>
-          </a:xfrm>
-          <a:prstGeom prst="rect">
-            <a:avLst/>
-          </a:prstGeom>
-        </p:spPr>
-      </p:pic>
+        </p:nvGraphicFramePr>
+        <p:xfrm>
+          <a:off x="822960" y="1051560"/>
+          <a:ext cx="10515600" cy="4754880"/>
+        </p:xfrm>
+        <a:graphic>
+          <a:graphicData uri="http://schemas.openxmlformats.org/drawingml/2006/chart">
+            <c:chart xmlns:c="http://schemas.openxmlformats.org/drawingml/2006/chart" r:id="rId2"/>
+          </a:graphicData>
+        </a:graphic>
+      </p:graphicFrame>
     </p:spTree>
   </p:cSld>
   <p:clrMapOvr>
@@ -3575,7 +6477,7 @@
         </p:nvSpPr>
         <p:spPr>
           <a:xfrm>
-            <a:off x="457200" y="274320"/>
+            <a:off x="457200" y="228600"/>
             <a:ext cx="11247120" cy="457200"/>
           </a:xfrm>
           <a:prstGeom prst="rect">
@@ -3584,7 +6486,7 @@
           <a:noFill/>
         </p:spPr>
         <p:txBody>
-          <a:bodyPr wrap="square">
+          <a:bodyPr wrap="none">
             <a:spAutoFit/>
           </a:bodyPr>
           <a:lstStyle/>
@@ -3597,21 +6499,39 @@
                 </a:solidFill>
                 <a:latin typeface="B Nazanin"/>
               </a:rPr>
-              <a:t>شکل ۳-۳  دامنه‌ی نتایج پنج بذر برای هر پیکربندی</a:t>
-            </a:r>
-          </a:p>
-        </p:txBody>
-      </p:sp>
-      <p:sp>
-        <p:nvSpPr>
-          <p:cNvPr id="3" name="TextBox 2"/>
+              <a:t>شکل ۳-۳  دامنه‌ی نتایج پنج بذر</a:t>
+            </a:r>
+          </a:p>
+        </p:txBody>
+      </p:sp>
+      <p:graphicFrame>
+        <p:nvGraphicFramePr>
+          <p:cNvPr id="3" name="Chart 2"/>
+          <p:cNvGraphicFramePr>
+            <a:graphicFrameLocks noGrp="1"/>
+          </p:cNvGraphicFramePr>
+          <p:nvPr/>
+        </p:nvGraphicFramePr>
+        <p:xfrm>
+          <a:off x="822960" y="1188720"/>
+          <a:ext cx="10515600" cy="3291840"/>
+        </p:xfrm>
+        <a:graphic>
+          <a:graphicData uri="http://schemas.openxmlformats.org/drawingml/2006/chart">
+            <c:chart xmlns:c="http://schemas.openxmlformats.org/drawingml/2006/chart" r:id="rId2"/>
+          </a:graphicData>
+        </a:graphic>
+      </p:graphicFrame>
+      <p:sp>
+        <p:nvSpPr>
+          <p:cNvPr id="4" name="TextBox 3"/>
           <p:cNvSpPr txBox="1"/>
           <p:nvPr/>
         </p:nvSpPr>
         <p:spPr>
           <a:xfrm>
-            <a:off x="457200" y="6309360"/>
-            <a:ext cx="11247120" cy="365760"/>
+            <a:off x="822960" y="4663440"/>
+            <a:ext cx="10515600" cy="274320"/>
           </a:xfrm>
           <a:prstGeom prst="rect">
             <a:avLst/>
@@ -3624,49 +6544,54 @@
           </a:bodyPr>
           <a:lstStyle/>
           <a:p>
-            <a:pPr rtl="1" algn="r"/>
-            <a:r>
-              <a:rPr sz="1100" b="0">
+            <a:pPr algn="ctr"/>
+            <a:r>
+              <a:rPr sz="1100" i="0">
                 <a:solidFill>
                   <a:srgbClr val="6A748C"/>
                 </a:solidFill>
-                <a:latin typeface="B Nazanin"/>
+                <a:latin typeface="Calibri"/>
               </a:rPr>
-              <a:t>برای ویرایش: راست‌کلیک روی شکل ← Convert to Shape   |   فایل برداری: figures/fig_seed_ranges.svg</a:t>
-            </a:r>
-          </a:p>
-        </p:txBody>
-      </p:sp>
-      <p:pic>
-        <p:nvPicPr>
-          <p:cNvPr id="4" name="Picture 3" descr="fig_seed_ranges.png"/>
-          <p:cNvPicPr>
-            <a:picLocks noChangeAspect="1"/>
-          </p:cNvPicPr>
+              <a:t>ViT-B spans 0.310-0.354 with mean 0.3405   |   ViT-L spans 0.370-0.423 with mean 0.3955</a:t>
+            </a:r>
+          </a:p>
+        </p:txBody>
+      </p:sp>
+      <p:sp>
+        <p:nvSpPr>
+          <p:cNvPr id="5" name="TextBox 4"/>
+          <p:cNvSpPr txBox="1"/>
           <p:nvPr/>
-        </p:nvPicPr>
-        <p:blipFill>
-          <a:blip r:embed="rId2">
-            <a:extLst>
-              <a:ext uri="{96DAC541-7B7A-43D3-8B79-37D633B846F1}">
-                <ns2:svgBlip xmlns:ns2="http://schemas.microsoft.com/office/drawing/2016/SVG/main" r:embed="rId3"/>
-              </a:ext>
-            </a:extLst>
-          </a:blip>
-          <a:stretch>
-            <a:fillRect/>
-          </a:stretch>
-        </p:blipFill>
+        </p:nvSpPr>
         <p:spPr>
           <a:xfrm>
-            <a:off x="838047" y="914400"/>
-            <a:ext cx="10515600" cy="4672272"/>
+            <a:off x="822960" y="5029200"/>
+            <a:ext cx="10515600" cy="274320"/>
           </a:xfrm>
           <a:prstGeom prst="rect">
             <a:avLst/>
           </a:prstGeom>
+          <a:noFill/>
         </p:spPr>
-      </p:pic>
+        <p:txBody>
+          <a:bodyPr wrap="square">
+            <a:spAutoFit/>
+          </a:bodyPr>
+          <a:lstStyle/>
+          <a:p>
+            <a:pPr algn="ctr"/>
+            <a:r>
+              <a:rPr sz="1100" i="1">
+                <a:solidFill>
+                  <a:srgbClr val="C16B2E"/>
+                </a:solidFill>
+                <a:latin typeface="Calibri"/>
+              </a:rPr>
+              <a:t>the two ranges do not overlap  (Mann-Whitney p = 1/252)</a:t>
+            </a:r>
+          </a:p>
+        </p:txBody>
+      </p:sp>
     </p:spTree>
   </p:cSld>
   <p:clrMapOvr>
@@ -3693,7 +6618,7 @@
         </p:nvSpPr>
         <p:spPr>
           <a:xfrm>
-            <a:off x="457200" y="274320"/>
+            <a:off x="457200" y="228600"/>
             <a:ext cx="11247120" cy="457200"/>
           </a:xfrm>
           <a:prstGeom prst="rect">
@@ -3702,7 +6627,7 @@
           <a:noFill/>
         </p:spPr>
         <p:txBody>
-          <a:bodyPr wrap="square">
+          <a:bodyPr wrap="none">
             <a:spAutoFit/>
           </a:bodyPr>
           <a:lstStyle/>
@@ -3720,71 +6645,24 @@
           </a:p>
         </p:txBody>
       </p:sp>
-      <p:sp>
-        <p:nvSpPr>
-          <p:cNvPr id="3" name="TextBox 2"/>
-          <p:cNvSpPr txBox="1"/>
+      <p:graphicFrame>
+        <p:nvGraphicFramePr>
+          <p:cNvPr id="3" name="Chart 2"/>
+          <p:cNvGraphicFramePr>
+            <a:graphicFrameLocks noGrp="1"/>
+          </p:cNvGraphicFramePr>
           <p:nvPr/>
-        </p:nvSpPr>
-        <p:spPr>
-          <a:xfrm>
-            <a:off x="457200" y="6309360"/>
-            <a:ext cx="11247120" cy="365760"/>
-          </a:xfrm>
-          <a:prstGeom prst="rect">
-            <a:avLst/>
-          </a:prstGeom>
-          <a:noFill/>
-        </p:spPr>
-        <p:txBody>
-          <a:bodyPr wrap="square">
-            <a:spAutoFit/>
-          </a:bodyPr>
-          <a:lstStyle/>
-          <a:p>
-            <a:pPr rtl="1" algn="r"/>
-            <a:r>
-              <a:rPr sz="1100" b="0">
-                <a:solidFill>
-                  <a:srgbClr val="6A748C"/>
-                </a:solidFill>
-                <a:latin typeface="B Nazanin"/>
-              </a:rPr>
-              <a:t>برای ویرایش: راست‌کلیک روی شکل ← Convert to Shape   |   فایل برداری: figures/fig_mixup_logit.svg</a:t>
-            </a:r>
-          </a:p>
-        </p:txBody>
-      </p:sp>
-      <p:pic>
-        <p:nvPicPr>
-          <p:cNvPr id="4" name="Picture 3" descr="fig_mixup_logit.png"/>
-          <p:cNvPicPr>
-            <a:picLocks noChangeAspect="1"/>
-          </p:cNvPicPr>
-          <p:nvPr/>
-        </p:nvPicPr>
-        <p:blipFill>
-          <a:blip r:embed="rId2">
-            <a:extLst>
-              <a:ext uri="{96DAC541-7B7A-43D3-8B79-37D633B846F1}">
-                <ns2:svgBlip xmlns:ns2="http://schemas.microsoft.com/office/drawing/2016/SVG/main" r:embed="rId3"/>
-              </a:ext>
-            </a:extLst>
-          </a:blip>
-          <a:stretch>
-            <a:fillRect/>
-          </a:stretch>
-        </p:blipFill>
-        <p:spPr>
-          <a:xfrm>
-            <a:off x="980942" y="914400"/>
-            <a:ext cx="10229811" cy="5212079"/>
-          </a:xfrm>
-          <a:prstGeom prst="rect">
-            <a:avLst/>
-          </a:prstGeom>
-        </p:spPr>
-      </p:pic>
+        </p:nvGraphicFramePr>
+        <p:xfrm>
+          <a:off x="822960" y="1051560"/>
+          <a:ext cx="10515600" cy="4754880"/>
+        </p:xfrm>
+        <a:graphic>
+          <a:graphicData uri="http://schemas.openxmlformats.org/drawingml/2006/chart">
+            <c:chart xmlns:c="http://schemas.openxmlformats.org/drawingml/2006/chart" r:id="rId2"/>
+          </a:graphicData>
+        </a:graphic>
+      </p:graphicFrame>
     </p:spTree>
   </p:cSld>
   <p:clrMapOvr>
@@ -3811,7 +6689,7 @@
         </p:nvSpPr>
         <p:spPr>
           <a:xfrm>
-            <a:off x="457200" y="274320"/>
+            <a:off x="457200" y="228600"/>
             <a:ext cx="11247120" cy="457200"/>
           </a:xfrm>
           <a:prstGeom prst="rect">
@@ -3820,7 +6698,7 @@
           <a:noFill/>
         </p:spPr>
         <p:txBody>
-          <a:bodyPr wrap="square">
+          <a:bodyPr wrap="none">
             <a:spAutoFit/>
           </a:bodyPr>
           <a:lstStyle/>
@@ -3838,16 +6716,34 @@
           </a:p>
         </p:txBody>
       </p:sp>
-      <p:sp>
-        <p:nvSpPr>
-          <p:cNvPr id="3" name="TextBox 2"/>
+      <p:graphicFrame>
+        <p:nvGraphicFramePr>
+          <p:cNvPr id="3" name="Chart 2"/>
+          <p:cNvGraphicFramePr>
+            <a:graphicFrameLocks noGrp="1"/>
+          </p:cNvGraphicFramePr>
+          <p:nvPr/>
+        </p:nvGraphicFramePr>
+        <p:xfrm>
+          <a:off x="822960" y="1143000"/>
+          <a:ext cx="10515600" cy="3566160"/>
+        </p:xfrm>
+        <a:graphic>
+          <a:graphicData uri="http://schemas.openxmlformats.org/drawingml/2006/chart">
+            <c:chart xmlns:c="http://schemas.openxmlformats.org/drawingml/2006/chart" r:id="rId2"/>
+          </a:graphicData>
+        </a:graphic>
+      </p:graphicFrame>
+      <p:sp>
+        <p:nvSpPr>
+          <p:cNvPr id="4" name="TextBox 3"/>
           <p:cNvSpPr txBox="1"/>
           <p:nvPr/>
         </p:nvSpPr>
         <p:spPr>
           <a:xfrm>
-            <a:off x="457200" y="6309360"/>
-            <a:ext cx="11247120" cy="365760"/>
+            <a:off x="822960" y="4892040"/>
+            <a:ext cx="10515600" cy="274320"/>
           </a:xfrm>
           <a:prstGeom prst="rect">
             <a:avLst/>
@@ -3860,49 +6756,54 @@
           </a:bodyPr>
           <a:lstStyle/>
           <a:p>
-            <a:pPr rtl="1" algn="r"/>
-            <a:r>
-              <a:rPr sz="1100" b="0">
+            <a:pPr algn="ctr"/>
+            <a:r>
+              <a:rPr sz="1100" i="0">
                 <a:solidFill>
                   <a:srgbClr val="6A748C"/>
                 </a:solidFill>
-                <a:latin typeface="B Nazanin"/>
+                <a:latin typeface="Calibri"/>
               </a:rPr>
-              <a:t>برای ویرایش: راست‌کلیک روی شکل ← Convert to Shape   |   فایل برداری: figures/fig_bootstrap_ci.svg</a:t>
-            </a:r>
-          </a:p>
-        </p:txBody>
-      </p:sp>
-      <p:pic>
-        <p:nvPicPr>
-          <p:cNvPr id="4" name="Picture 3" descr="fig_bootstrap_ci.png"/>
-          <p:cNvPicPr>
-            <a:picLocks noChangeAspect="1"/>
-          </p:cNvPicPr>
+              <a:t>point estimates:  AUC 0.9610   |   accuracy 0.6897   |   type accuracy 0.5000   |   macro F1 0.4298</a:t>
+            </a:r>
+          </a:p>
+        </p:txBody>
+      </p:sp>
+      <p:sp>
+        <p:nvSpPr>
+          <p:cNvPr id="5" name="TextBox 4"/>
+          <p:cNvSpPr txBox="1"/>
           <p:nvPr/>
-        </p:nvPicPr>
-        <p:blipFill>
-          <a:blip r:embed="rId2">
-            <a:extLst>
-              <a:ext uri="{96DAC541-7B7A-43D3-8B79-37D633B846F1}">
-                <ns2:svgBlip xmlns:ns2="http://schemas.microsoft.com/office/drawing/2016/SVG/main" r:embed="rId3"/>
-              </a:ext>
-            </a:extLst>
-          </a:blip>
-          <a:stretch>
-            <a:fillRect/>
-          </a:stretch>
-        </p:blipFill>
+        </p:nvSpPr>
         <p:spPr>
           <a:xfrm>
-            <a:off x="838047" y="914400"/>
-            <a:ext cx="10515600" cy="4760479"/>
+            <a:off x="822960" y="5257800"/>
+            <a:ext cx="10515600" cy="274320"/>
           </a:xfrm>
           <a:prstGeom prst="rect">
             <a:avLst/>
           </a:prstGeom>
+          <a:noFill/>
         </p:spPr>
-      </p:pic>
+        <p:txBody>
+          <a:bodyPr wrap="square">
+            <a:spAutoFit/>
+          </a:bodyPr>
+          <a:lstStyle/>
+          <a:p>
+            <a:pPr algn="ctr"/>
+            <a:r>
+              <a:rPr sz="1100" i="1">
+                <a:solidFill>
+                  <a:srgbClr val="6A748C"/>
+                </a:solidFill>
+                <a:latin typeface="Calibri"/>
+              </a:rPr>
+              <a:t>4000 bootstrap resamples of the 290 test videos</a:t>
+            </a:r>
+          </a:p>
+        </p:txBody>
+      </p:sp>
     </p:spTree>
   </p:cSld>
   <p:clrMapOvr>
@@ -3929,7 +6830,7 @@
         </p:nvSpPr>
         <p:spPr>
           <a:xfrm>
-            <a:off x="457200" y="274320"/>
+            <a:off x="457200" y="228600"/>
             <a:ext cx="11247120" cy="457200"/>
           </a:xfrm>
           <a:prstGeom prst="rect">
@@ -3938,7 +6839,7 @@
           <a:noFill/>
         </p:spPr>
         <p:txBody>
-          <a:bodyPr wrap="square">
+          <a:bodyPr wrap="none">
             <a:spAutoFit/>
           </a:bodyPr>
           <a:lstStyle/>
@@ -3956,16 +6857,34 @@
           </a:p>
         </p:txBody>
       </p:sp>
-      <p:sp>
-        <p:nvSpPr>
-          <p:cNvPr id="3" name="TextBox 2"/>
+      <p:graphicFrame>
+        <p:nvGraphicFramePr>
+          <p:cNvPr id="3" name="Chart 2"/>
+          <p:cNvGraphicFramePr>
+            <a:graphicFrameLocks noGrp="1"/>
+          </p:cNvGraphicFramePr>
+          <p:nvPr/>
+        </p:nvGraphicFramePr>
+        <p:xfrm>
+          <a:off x="822960" y="1097280"/>
+          <a:ext cx="10515600" cy="4206240"/>
+        </p:xfrm>
+        <a:graphic>
+          <a:graphicData uri="http://schemas.openxmlformats.org/drawingml/2006/chart">
+            <c:chart xmlns:c="http://schemas.openxmlformats.org/drawingml/2006/chart" r:id="rId2"/>
+          </a:graphicData>
+        </a:graphic>
+      </p:graphicFrame>
+      <p:sp>
+        <p:nvSpPr>
+          <p:cNvPr id="4" name="TextBox 3"/>
           <p:cNvSpPr txBox="1"/>
           <p:nvPr/>
         </p:nvSpPr>
         <p:spPr>
           <a:xfrm>
-            <a:off x="457200" y="6309360"/>
-            <a:ext cx="11247120" cy="365760"/>
+            <a:off x="822960" y="5486400"/>
+            <a:ext cx="10515600" cy="274320"/>
           </a:xfrm>
           <a:prstGeom prst="rect">
             <a:avLst/>
@@ -3978,49 +6897,54 @@
           </a:bodyPr>
           <a:lstStyle/>
           <a:p>
-            <a:pPr rtl="1" algn="r"/>
-            <a:r>
-              <a:rPr sz="1100" b="0">
+            <a:pPr algn="ctr"/>
+            <a:r>
+              <a:rPr sz="1100" i="0">
                 <a:solidFill>
                   <a:srgbClr val="6A748C"/>
                 </a:solidFill>
-                <a:latin typeface="B Nazanin"/>
+                <a:latin typeface="Calibri"/>
               </a:rPr>
-              <a:t>برای ویرایش: راست‌کلیک روی شکل ← Convert to Shape   |   فایل برداری: figures/fig_noise_floor.svg</a:t>
-            </a:r>
-          </a:p>
-        </p:txBody>
-      </p:sp>
-      <p:pic>
-        <p:nvPicPr>
-          <p:cNvPr id="4" name="Picture 3" descr="fig_noise_floor.png"/>
-          <p:cNvPicPr>
-            <a:picLocks noChangeAspect="1"/>
-          </p:cNvPicPr>
+              <a:t>evaluations against the same test split  -  8 runs inflate by 0.070, 200 runs by 0.110</a:t>
+            </a:r>
+          </a:p>
+        </p:txBody>
+      </p:sp>
+      <p:sp>
+        <p:nvSpPr>
+          <p:cNvPr id="5" name="TextBox 4"/>
+          <p:cNvSpPr txBox="1"/>
           <p:nvPr/>
-        </p:nvPicPr>
-        <p:blipFill>
-          <a:blip r:embed="rId2">
-            <a:extLst>
-              <a:ext uri="{96DAC541-7B7A-43D3-8B79-37D633B846F1}">
-                <ns2:svgBlip xmlns:ns2="http://schemas.microsoft.com/office/drawing/2016/SVG/main" r:embed="rId3"/>
-              </a:ext>
-            </a:extLst>
-          </a:blip>
-          <a:stretch>
-            <a:fillRect/>
-          </a:stretch>
-        </p:blipFill>
+        </p:nvSpPr>
         <p:spPr>
           <a:xfrm>
-            <a:off x="913860" y="914400"/>
-            <a:ext cx="10363974" cy="5212079"/>
+            <a:off x="822960" y="5852160"/>
+            <a:ext cx="10515600" cy="274320"/>
           </a:xfrm>
           <a:prstGeom prst="rect">
             <a:avLst/>
           </a:prstGeom>
+          <a:noFill/>
         </p:spPr>
-      </p:pic>
+        <p:txBody>
+          <a:bodyPr wrap="square">
+            <a:spAutoFit/>
+          </a:bodyPr>
+          <a:lstStyle/>
+          <a:p>
+            <a:pPr algn="ctr"/>
+            <a:r>
+              <a:rPr sz="1100" i="1">
+                <a:solidFill>
+                  <a:srgbClr val="6A748C"/>
+                </a:solidFill>
+                <a:latin typeface="Calibri"/>
+              </a:rPr>
+              <a:t>which is why every number in the report comes from a configuration fixed in advance</a:t>
+            </a:r>
+          </a:p>
+        </p:txBody>
+      </p:sp>
     </p:spTree>
   </p:cSld>
   <p:clrMapOvr>

--- a/thesis/Thesis_Figures_Editable.pptx
+++ b/thesis/Thesis_Figures_Editable.pptx
@@ -118,7 +118,7 @@
 <c:chartSpace xmlns:c="http://schemas.openxmlformats.org/drawingml/2006/chart" xmlns:a="http://schemas.openxmlformats.org/drawingml/2006/main" xmlns:r="http://schemas.openxmlformats.org/officeDocument/2006/relationships">
   <c:date1904 val="0"/>
   <c:chart>
-    <c:autoTitleDeleted val="0"/>
+    <c:autoTitleDeleted val="1"/>
     <c:plotArea>
       <c:barChart>
         <c:barDir val="col"/>
@@ -139,9 +139,25 @@
           </c:tx>
           <c:spPr>
             <a:solidFill>
-              <a:srgbClr val="2E5E8C"/>
+              <a:srgbClr val="6A748C"/>
             </a:solidFill>
           </c:spPr>
+          <c:dPt>
+            <c:idx val="3"/>
+            <c:spPr>
+              <a:solidFill>
+                <a:srgbClr val="2E5E8C"/>
+              </a:solidFill>
+            </c:spPr>
+          </c:dPt>
+          <c:dPt>
+            <c:idx val="4"/>
+            <c:spPr>
+              <a:solidFill>
+                <a:srgbClr val="C16B2E"/>
+              </a:solidFill>
+            </c:spPr>
+          </c:dPt>
           <c:cat>
             <c:strRef>
               <c:f>Sheet1!$A$2:$A$6</c:f>
@@ -249,7 +265,10 @@
       </c:catAx>
       <c:valAx>
         <c:axId val="-2113994440"/>
-        <c:scaling/>
+        <c:scaling>
+          <c:max val="0.5"/>
+          <c:min val="0.0"/>
+        </c:scaling>
         <c:delete val="0"/>
         <c:axPos val="l"/>
         <c:majorGridlines/>
@@ -295,7 +314,7 @@
 <c:chartSpace xmlns:c="http://schemas.openxmlformats.org/drawingml/2006/chart" xmlns:a="http://schemas.openxmlformats.org/drawingml/2006/main" xmlns:r="http://schemas.openxmlformats.org/officeDocument/2006/relationships">
   <c:date1904 val="0"/>
   <c:chart>
-    <c:autoTitleDeleted val="0"/>
+    <c:autoTitleDeleted val="1"/>
     <c:plotArea>
       <c:barChart>
         <c:barDir val="col"/>
@@ -601,7 +620,7 @@
 <c:chartSpace xmlns:c="http://schemas.openxmlformats.org/drawingml/2006/chart" xmlns:a="http://schemas.openxmlformats.org/drawingml/2006/main" xmlns:r="http://schemas.openxmlformats.org/officeDocument/2006/relationships">
   <c:date1904 val="0"/>
   <c:chart>
-    <c:autoTitleDeleted val="0"/>
+    <c:autoTitleDeleted val="1"/>
     <c:plotArea>
       <c:barChart>
         <c:barDir val="bar"/>
@@ -813,7 +832,7 @@
 <c:chartSpace xmlns:c="http://schemas.openxmlformats.org/drawingml/2006/chart" xmlns:a="http://schemas.openxmlformats.org/drawingml/2006/main" xmlns:r="http://schemas.openxmlformats.org/officeDocument/2006/relationships">
   <c:date1904 val="0"/>
   <c:chart>
-    <c:autoTitleDeleted val="0"/>
+    <c:autoTitleDeleted val="1"/>
     <c:plotArea>
       <c:barChart>
         <c:barDir val="col"/>
@@ -1070,7 +1089,7 @@
 <c:chartSpace xmlns:c="http://schemas.openxmlformats.org/drawingml/2006/chart" xmlns:a="http://schemas.openxmlformats.org/drawingml/2006/main" xmlns:r="http://schemas.openxmlformats.org/officeDocument/2006/relationships">
   <c:date1904 val="0"/>
   <c:chart>
-    <c:autoTitleDeleted val="0"/>
+    <c:autoTitleDeleted val="1"/>
     <c:plotArea>
       <c:barChart>
         <c:barDir val="bar"/>
@@ -1306,7 +1325,7 @@
 <c:chartSpace xmlns:c="http://schemas.openxmlformats.org/drawingml/2006/chart" xmlns:a="http://schemas.openxmlformats.org/drawingml/2006/main" xmlns:r="http://schemas.openxmlformats.org/officeDocument/2006/relationships">
   <c:date1904 val="0"/>
   <c:chart>
-    <c:autoTitleDeleted val="0"/>
+    <c:autoTitleDeleted val="1"/>
     <c:plotArea>
       <c:lineChart>
         <c:grouping val="standard"/>
@@ -6337,7 +6356,7 @@
         </p:nvGraphicFramePr>
         <p:xfrm>
           <a:off x="822960" y="1097280"/>
-          <a:ext cx="10515600" cy="4480560"/>
+          <a:ext cx="10515600" cy="4206240"/>
         </p:xfrm>
         <a:graphic>
           <a:graphicData uri="http://schemas.openxmlformats.org/drawingml/2006/chart">
@@ -6347,14 +6366,58 @@
       </p:graphicFrame>
       <p:sp>
         <p:nvSpPr>
-          <p:cNvPr id="4" name="TextBox 3"/>
+          <p:cNvPr id="4" name="Rectangle 3"/>
+          <p:cNvSpPr/>
+          <p:nvPr/>
+        </p:nvSpPr>
+        <p:spPr>
+          <a:xfrm>
+            <a:off x="1234440" y="2081364"/>
+            <a:ext cx="9966960" cy="15875"/>
+          </a:xfrm>
+          <a:prstGeom prst="rect">
+            <a:avLst/>
+          </a:prstGeom>
+          <a:solidFill>
+            <a:srgbClr val="C16B2E"/>
+          </a:solidFill>
+          <a:ln>
+            <a:noFill/>
+          </a:ln>
+          <a:effectLst/>
+        </p:spPr>
+        <p:style>
+          <a:lnRef idx="1">
+            <a:schemeClr val="accent1"/>
+          </a:lnRef>
+          <a:fillRef idx="3">
+            <a:schemeClr val="accent1"/>
+          </a:fillRef>
+          <a:effectRef idx="2">
+            <a:schemeClr val="accent1"/>
+          </a:effectRef>
+          <a:fontRef idx="minor">
+            <a:schemeClr val="lt1"/>
+          </a:fontRef>
+        </p:style>
+        <p:txBody>
+          <a:bodyPr rtlCol="0" anchor="ctr"/>
+          <a:lstStyle/>
+          <a:p>
+            <a:pPr algn="ctr"/>
+          </a:p>
+        </p:txBody>
+      </p:sp>
+      <p:sp>
+        <p:nvSpPr>
+          <p:cNvPr id="5" name="TextBox 4"/>
           <p:cNvSpPr txBox="1"/>
           <p:nvPr/>
         </p:nvSpPr>
         <p:spPr>
           <a:xfrm>
-            <a:off x="822960" y="5715000"/>
-            <a:ext cx="10515600" cy="274320"/>
+            <a:off x="1325880" y="1770468"/>
+            <a:ext cx="4572000" cy="274320"/>
           </a:xfrm>
           <a:prstGeom prst="rect">
             <a:avLst/>
@@ -6367,15 +6430,15 @@
           </a:bodyPr>
           <a:lstStyle/>
           <a:p>
-            <a:pPr algn="ctr"/>
-            <a:r>
-              <a:rPr sz="1000" i="1">
+            <a:pPr algn="l"/>
+            <a:r>
+              <a:rPr sz="1000" i="0">
                 <a:solidFill>
                   <a:srgbClr val="C16B2E"/>
                 </a:solidFill>
                 <a:latin typeface="Calibri"/>
               </a:rPr>
-              <a:t>X-CLIP fine-tuned reached 0.3881 on its own split</a:t>
+              <a:t>X-CLIP fine-tuned  0.3881</a:t>
             </a:r>
           </a:p>
         </p:txBody>
